--- a/OneMember-Merchant-Presentation.pptx
+++ b/OneMember-Merchant-Presentation.pptx
@@ -4,22 +4,25 @@
   <p:sldMasterIdLst>
     <p:sldMasterId id="2147483648" r:id="rId1"/>
   </p:sldMasterIdLst>
+  <p:notesMasterIdLst>
+    <p:notesMasterId r:id="rId15"/>
+  </p:notesMasterIdLst>
   <p:sldIdLst>
-    <p:sldId id="256" r:id="rId7"/>
-    <p:sldId id="257" r:id="rId9"/>
-    <p:sldId id="258" r:id="rId10"/>
-    <p:sldId id="259" r:id="rId11"/>
-    <p:sldId id="260" r:id="rId12"/>
-    <p:sldId id="261" r:id="rId13"/>
-    <p:sldId id="262" r:id="rId14"/>
-    <p:sldId id="263" r:id="rId15"/>
-    <p:sldId id="264" r:id="rId16"/>
-    <p:sldId id="265" r:id="rId17"/>
-    <p:sldId id="266" r:id="rId18"/>
-    <p:sldId id="267" r:id="rId19"/>
-    <p:sldId id="268" r:id="rId20"/>
+    <p:sldId id="256" r:id="rId2"/>
+    <p:sldId id="257" r:id="rId3"/>
+    <p:sldId id="258" r:id="rId4"/>
+    <p:sldId id="259" r:id="rId5"/>
+    <p:sldId id="260" r:id="rId6"/>
+    <p:sldId id="261" r:id="rId7"/>
+    <p:sldId id="262" r:id="rId8"/>
+    <p:sldId id="263" r:id="rId9"/>
+    <p:sldId id="264" r:id="rId10"/>
+    <p:sldId id="265" r:id="rId11"/>
+    <p:sldId id="266" r:id="rId12"/>
+    <p:sldId id="267" r:id="rId13"/>
+    <p:sldId id="268" r:id="rId14"/>
   </p:sldIdLst>
-  <p:sldSz cx="12191695" cy="6858000" type="screen4x3"/>
+  <p:sldSz cx="12192000" cy="6858000"/>
   <p:notesSz cx="6858000" cy="9144000"/>
   <p:defaultTextStyle>
     <a:defPPr>
@@ -116,11 +119,27 @@
       </a:defRPr>
     </a:lvl9pPr>
   </p:defaultTextStyle>
+  <p:extLst>
+    <p:ext uri="{EFAFB233-063F-42B5-8137-9DF3F51BA10A}">
+      <p15:sldGuideLst xmlns:p15="http://schemas.microsoft.com/office/powerpoint/2012/main">
+        <p15:guide id="1" orient="horz" pos="2160">
+          <p15:clr>
+            <a:srgbClr val="A4A3A4"/>
+          </p15:clr>
+        </p15:guide>
+        <p15:guide id="2" pos="2880">
+          <p15:clr>
+            <a:srgbClr val="A4A3A4"/>
+          </p15:clr>
+        </p15:guide>
+      </p15:sldGuideLst>
+    </p:ext>
+  </p:extLst>
 </p:presentation>
 </file>
 
 <file path=ppt/notesMasters/notesMaster1.xml><?xml version="1.0" encoding="utf-8"?>
-<p:notesMaster xmlns:a="http://schemas.openxmlformats.org/drawingml/2006/main" xmlns:p="http://schemas.openxmlformats.org/presentationml/2006/main" xmlns:r="http://schemas.openxmlformats.org/officeDocument/2006/relationships">
+<p:notesMaster xmlns:a="http://schemas.openxmlformats.org/drawingml/2006/main" xmlns:r="http://schemas.openxmlformats.org/officeDocument/2006/relationships" xmlns:p="http://schemas.openxmlformats.org/presentationml/2006/main">
   <p:cSld>
     <p:bg>
       <p:bgRef idx="1001">
@@ -141,241 +160,16 @@
           <a:chExt cx="0" cy="0"/>
         </a:xfrm>
       </p:grpSpPr>
-      <p:sp>
-        <p:nvSpPr>
-          <p:cNvPr id="2" name="Header Placeholder 1"/>
-          <p:cNvSpPr>
-            <a:spLocks noGrp="1"/>
-          </p:cNvSpPr>
-          <p:nvPr>
-            <p:ph type="hdr" sz="quarter"/>
-          </p:nvPr>
-        </p:nvSpPr>
-        <p:spPr>
-          <a:xfrm>
-            <a:off x="0" y="0"/>
-            <a:ext cx="2971800" cy="457200"/>
-          </a:xfrm>
-          <a:prstGeom prst="rect">
-            <a:avLst/>
-          </a:prstGeom>
-        </p:spPr>
-        <p:txBody>
-          <a:bodyPr vert="horz" lIns="91440" tIns="45720" rIns="91440" bIns="45720" rtlCol="0"/>
-          <a:lstStyle>
-            <a:lvl1pPr algn="l">
-              <a:defRPr sz="1200"/>
-            </a:lvl1pPr>
-          </a:lstStyle>
-          <a:p>
-            <a:endParaRPr lang="en-US"/>
-          </a:p>
-        </p:txBody>
-      </p:sp>
-      <p:sp>
-        <p:nvSpPr>
-          <p:cNvPr id="3" name="Date Placeholder 2"/>
-          <p:cNvSpPr>
-            <a:spLocks noGrp="1"/>
-          </p:cNvSpPr>
-          <p:nvPr>
-            <p:ph type="dt" idx="1"/>
-          </p:nvPr>
-        </p:nvSpPr>
-        <p:spPr>
-          <a:xfrm>
-            <a:off x="3884613" y="0"/>
-            <a:ext cx="2971800" cy="457200"/>
-          </a:xfrm>
-          <a:prstGeom prst="rect">
-            <a:avLst/>
-          </a:prstGeom>
-        </p:spPr>
-        <p:txBody>
-          <a:bodyPr vert="horz" lIns="91440" tIns="45720" rIns="91440" bIns="45720" rtlCol="0"/>
-          <a:lstStyle>
-            <a:lvl1pPr algn="r">
-              <a:defRPr sz="1200"/>
-            </a:lvl1pPr>
-          </a:lstStyle>
-          <a:p>
-            <a:fld id="{0F89C1C7-3DCD-1040-A9CF-14679D8B5DDD}" type="datetimeFigureOut">
-              <a:rPr lang="en-US" smtClean="0"/>
-              <a:t>10/17/16</a:t>
-            </a:fld>
-            <a:endParaRPr lang="en-US"/>
-          </a:p>
-        </p:txBody>
-      </p:sp>
-      <p:sp>
-        <p:nvSpPr>
-          <p:cNvPr id="4" name="Slide Image Placeholder 3"/>
-          <p:cNvSpPr>
-            <a:spLocks noGrp="1" noRot="1" noChangeAspect="1"/>
-          </p:cNvSpPr>
-          <p:nvPr>
-            <p:ph type="sldImg" idx="2"/>
-          </p:nvPr>
-        </p:nvSpPr>
-        <p:spPr>
-          <a:xfrm>
-            <a:off x="1143000" y="685800"/>
-            <a:ext cx="4572000" cy="3429000"/>
-          </a:xfrm>
-          <a:prstGeom prst="rect">
-            <a:avLst/>
-          </a:prstGeom>
-          <a:noFill/>
-          <a:ln w="12700">
-            <a:solidFill>
-              <a:prstClr val="black"/>
-            </a:solidFill>
-          </a:ln>
-        </p:spPr>
-        <p:txBody>
-          <a:bodyPr vert="horz" lIns="91440" tIns="45720" rIns="91440" bIns="45720" rtlCol="0" anchor="ctr"/>
-          <a:lstStyle/>
-          <a:p>
-            <a:endParaRPr lang="en-US"/>
-          </a:p>
-        </p:txBody>
-      </p:sp>
-      <p:sp>
-        <p:nvSpPr>
-          <p:cNvPr id="5" name="Notes Placeholder 4"/>
-          <p:cNvSpPr>
-            <a:spLocks noGrp="1"/>
-          </p:cNvSpPr>
-          <p:nvPr>
-            <p:ph type="body" sz="quarter" idx="3"/>
-          </p:nvPr>
-        </p:nvSpPr>
-        <p:spPr>
-          <a:xfrm>
-            <a:off x="685800" y="4343400"/>
-            <a:ext cx="5486400" cy="4114800"/>
-          </a:xfrm>
-          <a:prstGeom prst="rect">
-            <a:avLst/>
-          </a:prstGeom>
-        </p:spPr>
-        <p:txBody>
-          <a:bodyPr vert="horz" lIns="91440" tIns="45720" rIns="91440" bIns="45720" rtlCol="0"/>
-          <a:lstStyle/>
-          <a:p>
-            <a:pPr lvl="0"/>
-            <a:r>
-              <a:rPr lang="en-US" smtClean="0"/>
-              <a:t>Click to edit Master text styles</a:t>
-            </a:r>
-          </a:p>
-          <a:p>
-            <a:pPr lvl="1"/>
-            <a:r>
-              <a:rPr lang="en-US" smtClean="0"/>
-              <a:t>Second level</a:t>
-            </a:r>
-          </a:p>
-          <a:p>
-            <a:pPr lvl="2"/>
-            <a:r>
-              <a:rPr lang="en-US" smtClean="0"/>
-              <a:t>Third level</a:t>
-            </a:r>
-          </a:p>
-          <a:p>
-            <a:pPr lvl="3"/>
-            <a:r>
-              <a:rPr lang="en-US" smtClean="0"/>
-              <a:t>Fourth level</a:t>
-            </a:r>
-          </a:p>
-          <a:p>
-            <a:pPr lvl="4"/>
-            <a:r>
-              <a:rPr lang="en-US" smtClean="0"/>
-              <a:t>Fifth level</a:t>
-            </a:r>
-            <a:endParaRPr lang="en-US"/>
-          </a:p>
-        </p:txBody>
-      </p:sp>
-      <p:sp>
-        <p:nvSpPr>
-          <p:cNvPr id="6" name="Footer Placeholder 5"/>
-          <p:cNvSpPr>
-            <a:spLocks noGrp="1"/>
-          </p:cNvSpPr>
-          <p:nvPr>
-            <p:ph type="ftr" sz="quarter" idx="4"/>
-          </p:nvPr>
-        </p:nvSpPr>
-        <p:spPr>
-          <a:xfrm>
-            <a:off x="0" y="8685213"/>
-            <a:ext cx="2971800" cy="457200"/>
-          </a:xfrm>
-          <a:prstGeom prst="rect">
-            <a:avLst/>
-          </a:prstGeom>
-        </p:spPr>
-        <p:txBody>
-          <a:bodyPr vert="horz" lIns="91440" tIns="45720" rIns="91440" bIns="45720" rtlCol="0" anchor="b"/>
-          <a:lstStyle>
-            <a:lvl1pPr algn="l">
-              <a:defRPr sz="1200"/>
-            </a:lvl1pPr>
-          </a:lstStyle>
-          <a:p>
-            <a:endParaRPr lang="en-US"/>
-          </a:p>
-        </p:txBody>
-      </p:sp>
-      <p:sp>
-        <p:nvSpPr>
-          <p:cNvPr id="7" name="Slide Number Placeholder 6"/>
-          <p:cNvSpPr>
-            <a:spLocks noGrp="1"/>
-          </p:cNvSpPr>
-          <p:nvPr>
-            <p:ph type="sldNum" sz="quarter" idx="5"/>
-          </p:nvPr>
-        </p:nvSpPr>
-        <p:spPr>
-          <a:xfrm>
-            <a:off x="3884613" y="8685213"/>
-            <a:ext cx="2971800" cy="457200"/>
-          </a:xfrm>
-          <a:prstGeom prst="rect">
-            <a:avLst/>
-          </a:prstGeom>
-        </p:spPr>
-        <p:txBody>
-          <a:bodyPr vert="horz" lIns="91440" tIns="45720" rIns="91440" bIns="45720" rtlCol="0" anchor="b"/>
-          <a:lstStyle>
-            <a:lvl1pPr algn="r">
-              <a:defRPr sz="1200"/>
-            </a:lvl1pPr>
-          </a:lstStyle>
-          <a:p>
-            <a:fld id="{BB5E49A5-4136-284D-997B-48E1D791AD67}" type="slidenum">
-              <a:rPr lang="en-US" smtClean="0"/>
-              <a:t>‹#›</a:t>
-            </a:fld>
-            <a:endParaRPr lang="en-US"/>
-          </a:p>
-        </p:txBody>
-      </p:sp>
     </p:spTree>
     <p:extLst>
       <p:ext uri="{BB962C8B-B14F-4D97-AF65-F5344CB8AC3E}">
-        <p14:creationId xmlns:p14="http://schemas.microsoft.com/office/powerpoint/2010/main" val="2623252185"/>
+        <p14:creationId xmlns:p14="http://schemas.microsoft.com/office/powerpoint/2010/main" val="1473654043"/>
       </p:ext>
     </p:extLst>
   </p:cSld>
   <p:clrMap bg1="lt1" tx1="dk1" bg2="lt2" tx2="dk2" accent1="accent1" accent2="accent2" accent3="accent3" accent4="accent4" accent5="accent5" accent6="accent6" hlink="hlink" folHlink="folHlink"/>
   <p:notesStyle>
-    <a:lvl1pPr marL="0" algn="l" defTabSz="457200" rtl="0" eaLnBrk="1" latinLnBrk="0" hangingPunct="1">
+    <a:lvl1pPr marL="0" algn="l" defTabSz="914400" rtl="0" eaLnBrk="1" latinLnBrk="0" hangingPunct="1">
       <a:defRPr sz="1200" kern="1200">
         <a:solidFill>
           <a:schemeClr val="tx1"/>
@@ -385,7 +179,7 @@
         <a:cs typeface="+mn-cs"/>
       </a:defRPr>
     </a:lvl1pPr>
-    <a:lvl2pPr marL="457200" algn="l" defTabSz="457200" rtl="0" eaLnBrk="1" latinLnBrk="0" hangingPunct="1">
+    <a:lvl2pPr marL="457200" algn="l" defTabSz="914400" rtl="0" eaLnBrk="1" latinLnBrk="0" hangingPunct="1">
       <a:defRPr sz="1200" kern="1200">
         <a:solidFill>
           <a:schemeClr val="tx1"/>
@@ -395,7 +189,7 @@
         <a:cs typeface="+mn-cs"/>
       </a:defRPr>
     </a:lvl2pPr>
-    <a:lvl3pPr marL="914400" algn="l" defTabSz="457200" rtl="0" eaLnBrk="1" latinLnBrk="0" hangingPunct="1">
+    <a:lvl3pPr marL="914400" algn="l" defTabSz="914400" rtl="0" eaLnBrk="1" latinLnBrk="0" hangingPunct="1">
       <a:defRPr sz="1200" kern="1200">
         <a:solidFill>
           <a:schemeClr val="tx1"/>
@@ -405,7 +199,7 @@
         <a:cs typeface="+mn-cs"/>
       </a:defRPr>
     </a:lvl3pPr>
-    <a:lvl4pPr marL="1371600" algn="l" defTabSz="457200" rtl="0" eaLnBrk="1" latinLnBrk="0" hangingPunct="1">
+    <a:lvl4pPr marL="1371600" algn="l" defTabSz="914400" rtl="0" eaLnBrk="1" latinLnBrk="0" hangingPunct="1">
       <a:defRPr sz="1200" kern="1200">
         <a:solidFill>
           <a:schemeClr val="tx1"/>
@@ -415,7 +209,7 @@
         <a:cs typeface="+mn-cs"/>
       </a:defRPr>
     </a:lvl4pPr>
-    <a:lvl5pPr marL="1828800" algn="l" defTabSz="457200" rtl="0" eaLnBrk="1" latinLnBrk="0" hangingPunct="1">
+    <a:lvl5pPr marL="1828800" algn="l" defTabSz="914400" rtl="0" eaLnBrk="1" latinLnBrk="0" hangingPunct="1">
       <a:defRPr sz="1200" kern="1200">
         <a:solidFill>
           <a:schemeClr val="tx1"/>
@@ -425,7 +219,7 @@
         <a:cs typeface="+mn-cs"/>
       </a:defRPr>
     </a:lvl5pPr>
-    <a:lvl6pPr marL="2286000" algn="l" defTabSz="457200" rtl="0" eaLnBrk="1" latinLnBrk="0" hangingPunct="1">
+    <a:lvl6pPr marL="2286000" algn="l" defTabSz="914400" rtl="0" eaLnBrk="1" latinLnBrk="0" hangingPunct="1">
       <a:defRPr sz="1200" kern="1200">
         <a:solidFill>
           <a:schemeClr val="tx1"/>
@@ -435,7 +229,7 @@
         <a:cs typeface="+mn-cs"/>
       </a:defRPr>
     </a:lvl6pPr>
-    <a:lvl7pPr marL="2743200" algn="l" defTabSz="457200" rtl="0" eaLnBrk="1" latinLnBrk="0" hangingPunct="1">
+    <a:lvl7pPr marL="2743200" algn="l" defTabSz="914400" rtl="0" eaLnBrk="1" latinLnBrk="0" hangingPunct="1">
       <a:defRPr sz="1200" kern="1200">
         <a:solidFill>
           <a:schemeClr val="tx1"/>
@@ -445,7 +239,7 @@
         <a:cs typeface="+mn-cs"/>
       </a:defRPr>
     </a:lvl7pPr>
-    <a:lvl8pPr marL="3200400" algn="l" defTabSz="457200" rtl="0" eaLnBrk="1" latinLnBrk="0" hangingPunct="1">
+    <a:lvl8pPr marL="3200400" algn="l" defTabSz="914400" rtl="0" eaLnBrk="1" latinLnBrk="0" hangingPunct="1">
       <a:defRPr sz="1200" kern="1200">
         <a:solidFill>
           <a:schemeClr val="tx1"/>
@@ -455,7 +249,7 @@
         <a:cs typeface="+mn-cs"/>
       </a:defRPr>
     </a:lvl8pPr>
-    <a:lvl9pPr marL="3657600" algn="l" defTabSz="457200" rtl="0" eaLnBrk="1" latinLnBrk="0" hangingPunct="1">
+    <a:lvl9pPr marL="3657600" algn="l" defTabSz="914400" rtl="0" eaLnBrk="1" latinLnBrk="0" hangingPunct="1">
       <a:defRPr sz="1200" kern="1200">
         <a:solidFill>
           <a:schemeClr val="tx1"/>
@@ -470,7 +264,7 @@
 </file>
 
 <file path=ppt/notesSlides/notesSlide1.xml><?xml version="1.0" encoding="utf-8"?>
-<p:notes xmlns:a="http://schemas.openxmlformats.org/drawingml/2006/main" xmlns:p="http://schemas.openxmlformats.org/presentationml/2006/main" xmlns:r="http://schemas.openxmlformats.org/officeDocument/2006/relationships">
+<p:notes xmlns:a="http://schemas.openxmlformats.org/drawingml/2006/main" xmlns:r="http://schemas.openxmlformats.org/officeDocument/2006/relationships" xmlns:p="http://schemas.openxmlformats.org/presentationml/2006/main">
   <p:cSld>
     <p:spTree>
       <p:nvGrpSpPr>
@@ -490,7 +284,7 @@
         <p:nvSpPr>
           <p:cNvPr id="2" name="Slide Image Placeholder 1"/>
           <p:cNvSpPr>
-            <a:spLocks noGrp="1"/>
+            <a:spLocks noGrp="1" noRot="1" noChangeAspect="1"/>
           </p:cNvSpPr>
           <p:nvPr>
             <p:ph type="sldImg" idx="2"/>
@@ -505,7 +299,7 @@
             <a:spLocks noGrp="1"/>
           </p:cNvSpPr>
           <p:nvPr>
-            <p:ph type="body" idx="3" sz="quarter"/>
+            <p:ph type="body" sz="quarter" idx="3"/>
           </p:nvPr>
         </p:nvSpPr>
         <p:spPr/>
@@ -517,19 +311,25 @@
               <a:t>SLIDE 1 — TITLE  (Target: 1 min)</a:t>
             </a:r>
           </a:p>
-          <a:p/>
+          <a:p>
+            <a:endParaRPr/>
+          </a:p>
           <a:p>
             <a:r>
               <a:t>Open: "Thank you for giving us 20 minutes today."</a:t>
             </a:r>
           </a:p>
-          <a:p/>
+          <a:p>
+            <a:endParaRPr/>
+          </a:p>
           <a:p>
             <a:r>
               <a:t>OneMember is a merchant growth platform — not just a loyalty app. We give local businesses the tools that enterprise chains have always had.</a:t>
             </a:r>
           </a:p>
-          <a:p/>
+          <a:p>
+            <a:endParaRPr/>
+          </a:p>
           <a:p>
             <a:r>
               <a:t>Key talking points:</a:t>
@@ -550,7 +350,9 @@
               <a:t>• ASK: "What loyalty or membership programme do you run today?"</a:t>
             </a:r>
           </a:p>
-          <a:p/>
+          <a:p>
+            <a:endParaRPr/>
+          </a:p>
         </p:txBody>
       </p:sp>
       <p:sp>
@@ -560,7 +362,7 @@
             <a:spLocks noGrp="1"/>
           </p:cNvSpPr>
           <p:nvPr>
-            <p:ph type="sldNum" idx="5" sz="quarter"/>
+            <p:ph type="sldNum" sz="quarter" idx="5"/>
           </p:nvPr>
         </p:nvSpPr>
         <p:spPr/>
@@ -574,7 +376,7 @@
 </file>
 
 <file path=ppt/notesSlides/notesSlide10.xml><?xml version="1.0" encoding="utf-8"?>
-<p:notes xmlns:a="http://schemas.openxmlformats.org/drawingml/2006/main" xmlns:p="http://schemas.openxmlformats.org/presentationml/2006/main" xmlns:r="http://schemas.openxmlformats.org/officeDocument/2006/relationships">
+<p:notes xmlns:a="http://schemas.openxmlformats.org/drawingml/2006/main" xmlns:r="http://schemas.openxmlformats.org/officeDocument/2006/relationships" xmlns:p="http://schemas.openxmlformats.org/presentationml/2006/main">
   <p:cSld>
     <p:spTree>
       <p:nvGrpSpPr>
@@ -594,7 +396,7 @@
         <p:nvSpPr>
           <p:cNvPr id="2" name="Slide Image Placeholder 1"/>
           <p:cNvSpPr>
-            <a:spLocks noGrp="1"/>
+            <a:spLocks noGrp="1" noRot="1" noChangeAspect="1"/>
           </p:cNvSpPr>
           <p:nvPr>
             <p:ph type="sldImg" idx="2"/>
@@ -609,7 +411,7 @@
             <a:spLocks noGrp="1"/>
           </p:cNvSpPr>
           <p:nvPr>
-            <p:ph type="body" idx="3" sz="quarter"/>
+            <p:ph type="body" sz="quarter" idx="3"/>
           </p:nvPr>
         </p:nvSpPr>
         <p:spPr/>
@@ -621,19 +423,25 @@
               <a:t>SLIDE 10 — INTELLIGENCE  (Target: 1 min)</a:t>
             </a:r>
           </a:p>
-          <a:p/>
+          <a:p>
+            <a:endParaRPr/>
+          </a:p>
           <a:p>
             <a:r>
               <a:t>Position as the near-future state — Phase 2 roadmap.</a:t>
             </a:r>
           </a:p>
-          <a:p/>
+          <a:p>
+            <a:endParaRPr/>
+          </a:p>
           <a:p>
             <a:r>
               <a:t>"Right now you get a clear dashboard. In the next phase, OneMember adds intelligence on top of your data."</a:t>
             </a:r>
           </a:p>
-          <a:p/>
+          <a:p>
+            <a:endParaRPr/>
+          </a:p>
           <a:p>
             <a:r>
               <a:t>Coming capabilities:</a:t>
@@ -669,13 +477,17 @@
               <a:t>• Revenue attribution — campaign ROI tracked directly</a:t>
             </a:r>
           </a:p>
-          <a:p/>
+          <a:p>
+            <a:endParaRPr/>
+          </a:p>
           <a:p>
             <a:r>
               <a:t>"We are building the CRM that local businesses have never had."</a:t>
             </a:r>
           </a:p>
-          <a:p/>
+          <a:p>
+            <a:endParaRPr/>
+          </a:p>
         </p:txBody>
       </p:sp>
       <p:sp>
@@ -685,7 +497,7 @@
             <a:spLocks noGrp="1"/>
           </p:cNvSpPr>
           <p:nvPr>
-            <p:ph type="sldNum" idx="5" sz="quarter"/>
+            <p:ph type="sldNum" sz="quarter" idx="5"/>
           </p:nvPr>
         </p:nvSpPr>
         <p:spPr/>
@@ -699,7 +511,7 @@
 </file>
 
 <file path=ppt/notesSlides/notesSlide11.xml><?xml version="1.0" encoding="utf-8"?>
-<p:notes xmlns:a="http://schemas.openxmlformats.org/drawingml/2006/main" xmlns:p="http://schemas.openxmlformats.org/presentationml/2006/main" xmlns:r="http://schemas.openxmlformats.org/officeDocument/2006/relationships">
+<p:notes xmlns:a="http://schemas.openxmlformats.org/drawingml/2006/main" xmlns:r="http://schemas.openxmlformats.org/officeDocument/2006/relationships" xmlns:p="http://schemas.openxmlformats.org/presentationml/2006/main">
   <p:cSld>
     <p:spTree>
       <p:nvGrpSpPr>
@@ -719,7 +531,7 @@
         <p:nvSpPr>
           <p:cNvPr id="2" name="Slide Image Placeholder 1"/>
           <p:cNvSpPr>
-            <a:spLocks noGrp="1"/>
+            <a:spLocks noGrp="1" noRot="1" noChangeAspect="1"/>
           </p:cNvSpPr>
           <p:nvPr>
             <p:ph type="sldImg" idx="2"/>
@@ -734,7 +546,7 @@
             <a:spLocks noGrp="1"/>
           </p:cNvSpPr>
           <p:nvPr>
-            <p:ph type="body" idx="3" sz="quarter"/>
+            <p:ph type="body" sz="quarter" idx="3"/>
           </p:nvPr>
         </p:nvSpPr>
         <p:spPr/>
@@ -746,13 +558,17 @@
               <a:t>SLIDE 11 — ROADMAP  (Target: 1 min)</a:t>
             </a:r>
           </a:p>
-          <a:p/>
+          <a:p>
+            <a:endParaRPr/>
+          </a:p>
           <a:p>
             <a:r>
               <a:t>Direction, not promises. Brief.</a:t>
             </a:r>
           </a:p>
-          <a:p/>
+          <a:p>
+            <a:endParaRPr/>
+          </a:p>
           <a:p>
             <a:r>
               <a:t>Phase 1 (Now): Merchant loyalty — membership, rewards, campaigns, analytics</a:t>
@@ -793,13 +609,17 @@
               <a:t>Phase 8: Regional — expand beyond Thailand to Southeast Asia</a:t>
             </a:r>
           </a:p>
-          <a:p/>
+          <a:p>
+            <a:endParaRPr/>
+          </a:p>
           <a:p>
             <a:r>
               <a:t>"We are building the operating system for local business."</a:t>
             </a:r>
           </a:p>
-          <a:p/>
+          <a:p>
+            <a:endParaRPr/>
+          </a:p>
         </p:txBody>
       </p:sp>
       <p:sp>
@@ -809,7 +629,7 @@
             <a:spLocks noGrp="1"/>
           </p:cNvSpPr>
           <p:nvPr>
-            <p:ph type="sldNum" idx="5" sz="quarter"/>
+            <p:ph type="sldNum" sz="quarter" idx="5"/>
           </p:nvPr>
         </p:nvSpPr>
         <p:spPr/>
@@ -823,7 +643,7 @@
 </file>
 
 <file path=ppt/notesSlides/notesSlide12.xml><?xml version="1.0" encoding="utf-8"?>
-<p:notes xmlns:a="http://schemas.openxmlformats.org/drawingml/2006/main" xmlns:p="http://schemas.openxmlformats.org/presentationml/2006/main" xmlns:r="http://schemas.openxmlformats.org/officeDocument/2006/relationships">
+<p:notes xmlns:a="http://schemas.openxmlformats.org/drawingml/2006/main" xmlns:r="http://schemas.openxmlformats.org/officeDocument/2006/relationships" xmlns:p="http://schemas.openxmlformats.org/presentationml/2006/main">
   <p:cSld>
     <p:spTree>
       <p:nvGrpSpPr>
@@ -843,7 +663,7 @@
         <p:nvSpPr>
           <p:cNvPr id="2" name="Slide Image Placeholder 1"/>
           <p:cNvSpPr>
-            <a:spLocks noGrp="1"/>
+            <a:spLocks noGrp="1" noRot="1" noChangeAspect="1"/>
           </p:cNvSpPr>
           <p:nvPr>
             <p:ph type="sldImg" idx="2"/>
@@ -858,7 +678,7 @@
             <a:spLocks noGrp="1"/>
           </p:cNvSpPr>
           <p:nvPr>
-            <p:ph type="body" idx="3" sz="quarter"/>
+            <p:ph type="body" sz="quarter" idx="3"/>
           </p:nvPr>
         </p:nvSpPr>
         <p:spPr/>
@@ -870,13 +690,17 @@
               <a:t>SLIDE 12 — WHY DIFFERENT  (Target: 1 min)</a:t>
             </a:r>
           </a:p>
-          <a:p/>
+          <a:p>
+            <a:endParaRPr/>
+          </a:p>
           <a:p>
             <a:r>
               <a:t>Close the story. Six real differentiators.</a:t>
             </a:r>
           </a:p>
-          <a:p/>
+          <a:p>
+            <a:endParaRPr/>
+          </a:p>
           <a:p>
             <a:r>
               <a:t>1. Merchant-first — built for growth, not an app store rating</a:t>
@@ -907,13 +731,17 @@
               <a:t>6. Built to scale — one outlet to a full chain, same platform</a:t>
             </a:r>
           </a:p>
-          <a:p/>
+          <a:p>
+            <a:endParaRPr/>
+          </a:p>
           <a:p>
             <a:r>
               <a:t>"We built this for merchants like you."</a:t>
             </a:r>
           </a:p>
-          <a:p/>
+          <a:p>
+            <a:endParaRPr/>
+          </a:p>
         </p:txBody>
       </p:sp>
       <p:sp>
@@ -923,7 +751,7 @@
             <a:spLocks noGrp="1"/>
           </p:cNvSpPr>
           <p:nvPr>
-            <p:ph type="sldNum" idx="5" sz="quarter"/>
+            <p:ph type="sldNum" sz="quarter" idx="5"/>
           </p:nvPr>
         </p:nvSpPr>
         <p:spPr/>
@@ -937,7 +765,7 @@
 </file>
 
 <file path=ppt/notesSlides/notesSlide13.xml><?xml version="1.0" encoding="utf-8"?>
-<p:notes xmlns:a="http://schemas.openxmlformats.org/drawingml/2006/main" xmlns:p="http://schemas.openxmlformats.org/presentationml/2006/main" xmlns:r="http://schemas.openxmlformats.org/officeDocument/2006/relationships">
+<p:notes xmlns:a="http://schemas.openxmlformats.org/drawingml/2006/main" xmlns:r="http://schemas.openxmlformats.org/officeDocument/2006/relationships" xmlns:p="http://schemas.openxmlformats.org/presentationml/2006/main">
   <p:cSld>
     <p:spTree>
       <p:nvGrpSpPr>
@@ -957,7 +785,7 @@
         <p:nvSpPr>
           <p:cNvPr id="2" name="Slide Image Placeholder 1"/>
           <p:cNvSpPr>
-            <a:spLocks noGrp="1"/>
+            <a:spLocks noGrp="1" noRot="1" noChangeAspect="1"/>
           </p:cNvSpPr>
           <p:nvPr>
             <p:ph type="sldImg" idx="2"/>
@@ -972,7 +800,7 @@
             <a:spLocks noGrp="1"/>
           </p:cNvSpPr>
           <p:nvPr>
-            <p:ph type="body" idx="3" sz="quarter"/>
+            <p:ph type="body" sz="quarter" idx="3"/>
           </p:nvPr>
         </p:nvSpPr>
         <p:spPr/>
@@ -984,13 +812,17 @@
               <a:t>SLIDE 13 — CALL TO ACTION  (Target: 1 min)</a:t>
             </a:r>
           </a:p>
-          <a:p/>
+          <a:p>
+            <a:endParaRPr/>
+          </a:p>
           <a:p>
             <a:r>
               <a:t>Close with three clear options.</a:t>
             </a:r>
           </a:p>
-          <a:p/>
+          <a:p>
+            <a:endParaRPr/>
+          </a:p>
           <a:p>
             <a:r>
               <a:t>A. Start Today — open a laptop, register right now. Takes 5 minutes.</a:t>
@@ -1006,19 +838,25 @@
               <a:t>C. Take Home — one-page summary, follow-up within 48 hours.</a:t>
             </a:r>
           </a:p>
-          <a:p/>
+          <a:p>
+            <a:endParaRPr/>
+          </a:p>
           <a:p>
             <a:r>
               <a:t>RULE: Never leave without a next step — a date, a time, a commitment.</a:t>
             </a:r>
           </a:p>
-          <a:p/>
+          <a:p>
+            <a:endParaRPr/>
+          </a:p>
           <a:p>
             <a:r>
               <a:t>ASK: "Which of these three makes the most sense for you today?"</a:t>
             </a:r>
           </a:p>
-          <a:p/>
+          <a:p>
+            <a:endParaRPr/>
+          </a:p>
         </p:txBody>
       </p:sp>
       <p:sp>
@@ -1028,7 +866,7 @@
             <a:spLocks noGrp="1"/>
           </p:cNvSpPr>
           <p:nvPr>
-            <p:ph type="sldNum" idx="5" sz="quarter"/>
+            <p:ph type="sldNum" sz="quarter" idx="5"/>
           </p:nvPr>
         </p:nvSpPr>
         <p:spPr/>
@@ -1042,7 +880,7 @@
 </file>
 
 <file path=ppt/notesSlides/notesSlide2.xml><?xml version="1.0" encoding="utf-8"?>
-<p:notes xmlns:a="http://schemas.openxmlformats.org/drawingml/2006/main" xmlns:p="http://schemas.openxmlformats.org/presentationml/2006/main" xmlns:r="http://schemas.openxmlformats.org/officeDocument/2006/relationships">
+<p:notes xmlns:a="http://schemas.openxmlformats.org/drawingml/2006/main" xmlns:r="http://schemas.openxmlformats.org/officeDocument/2006/relationships" xmlns:p="http://schemas.openxmlformats.org/presentationml/2006/main">
   <p:cSld>
     <p:spTree>
       <p:nvGrpSpPr>
@@ -1062,7 +900,7 @@
         <p:nvSpPr>
           <p:cNvPr id="2" name="Slide Image Placeholder 1"/>
           <p:cNvSpPr>
-            <a:spLocks noGrp="1"/>
+            <a:spLocks noGrp="1" noRot="1" noChangeAspect="1"/>
           </p:cNvSpPr>
           <p:nvPr>
             <p:ph type="sldImg" idx="2"/>
@@ -1077,7 +915,7 @@
             <a:spLocks noGrp="1"/>
           </p:cNvSpPr>
           <p:nvPr>
-            <p:ph type="body" idx="3" sz="quarter"/>
+            <p:ph type="body" sz="quarter" idx="3"/>
           </p:nvPr>
         </p:nvSpPr>
         <p:spPr/>
@@ -1089,13 +927,17 @@
               <a:t>SLIDE 2 — THE PROBLEM  (Target: 2 min)</a:t>
             </a:r>
           </a:p>
-          <a:p/>
+          <a:p>
+            <a:endParaRPr/>
+          </a:p>
           <a:p>
             <a:r>
               <a:t>Make the merchant feel understood before presenting a solution.</a:t>
             </a:r>
           </a:p>
-          <a:p/>
+          <a:p>
+            <a:endParaRPr/>
+          </a:p>
           <a:p>
             <a:r>
               <a:t>• Paper loyalty cards get lost, damaged, forgotten — merchant gains nothing</a:t>
@@ -1121,13 +963,17 @@
               <a:t>• Competitors with digital loyalty gain measurable advantage</a:t>
             </a:r>
           </a:p>
-          <a:p/>
+          <a:p>
+            <a:endParaRPr/>
+          </a:p>
           <a:p>
             <a:r>
               <a:t>ASK: "How do you know which customers haven't been back in 3 months?"</a:t>
             </a:r>
           </a:p>
-          <a:p/>
+          <a:p>
+            <a:endParaRPr/>
+          </a:p>
         </p:txBody>
       </p:sp>
       <p:sp>
@@ -1137,7 +983,7 @@
             <a:spLocks noGrp="1"/>
           </p:cNvSpPr>
           <p:nvPr>
-            <p:ph type="sldNum" idx="5" sz="quarter"/>
+            <p:ph type="sldNum" sz="quarter" idx="5"/>
           </p:nvPr>
         </p:nvSpPr>
         <p:spPr/>
@@ -1151,7 +997,7 @@
 </file>
 
 <file path=ppt/notesSlides/notesSlide3.xml><?xml version="1.0" encoding="utf-8"?>
-<p:notes xmlns:a="http://schemas.openxmlformats.org/drawingml/2006/main" xmlns:p="http://schemas.openxmlformats.org/presentationml/2006/main" xmlns:r="http://schemas.openxmlformats.org/officeDocument/2006/relationships">
+<p:notes xmlns:a="http://schemas.openxmlformats.org/drawingml/2006/main" xmlns:r="http://schemas.openxmlformats.org/officeDocument/2006/relationships" xmlns:p="http://schemas.openxmlformats.org/presentationml/2006/main">
   <p:cSld>
     <p:spTree>
       <p:nvGrpSpPr>
@@ -1171,7 +1017,7 @@
         <p:nvSpPr>
           <p:cNvPr id="2" name="Slide Image Placeholder 1"/>
           <p:cNvSpPr>
-            <a:spLocks noGrp="1"/>
+            <a:spLocks noGrp="1" noRot="1" noChangeAspect="1"/>
           </p:cNvSpPr>
           <p:nvPr>
             <p:ph type="sldImg" idx="2"/>
@@ -1186,7 +1032,7 @@
             <a:spLocks noGrp="1"/>
           </p:cNvSpPr>
           <p:nvPr>
-            <p:ph type="body" idx="3" sz="quarter"/>
+            <p:ph type="body" sz="quarter" idx="3"/>
           </p:nvPr>
         </p:nvSpPr>
         <p:spPr/>
@@ -1198,13 +1044,17 @@
               <a:t>SLIDE 3 — THE COST  (Target: 1 min)</a:t>
             </a:r>
           </a:p>
-          <a:p/>
+          <a:p>
+            <a:endParaRPr/>
+          </a:p>
           <a:p>
             <a:r>
               <a:t>Let the numbers breathe. Do not rush.</a:t>
             </a:r>
           </a:p>
-          <a:p/>
+          <a:p>
+            <a:endParaRPr/>
+          </a:p>
           <a:p>
             <a:r>
               <a:t>• 5–7× more expensive to acquire a new customer vs. retain one</a:t>
@@ -1220,19 +1070,25 @@
               <a:t>• 5% increase in retention can drive 25–95% profit increase (Bain &amp; Co)</a:t>
             </a:r>
           </a:p>
-          <a:p/>
+          <a:p>
+            <a:endParaRPr/>
+          </a:p>
           <a:p>
             <a:r>
               <a:t>Make retention feel like the highest-ROI activity in the room.</a:t>
             </a:r>
           </a:p>
-          <a:p/>
+          <a:p>
+            <a:endParaRPr/>
+          </a:p>
           <a:p>
             <a:r>
               <a:t>ASK: "If you could bring back 20% of lapsed customers, what would that mean?"</a:t>
             </a:r>
           </a:p>
-          <a:p/>
+          <a:p>
+            <a:endParaRPr/>
+          </a:p>
         </p:txBody>
       </p:sp>
       <p:sp>
@@ -1242,7 +1098,7 @@
             <a:spLocks noGrp="1"/>
           </p:cNvSpPr>
           <p:nvPr>
-            <p:ph type="sldNum" idx="5" sz="quarter"/>
+            <p:ph type="sldNum" sz="quarter" idx="5"/>
           </p:nvPr>
         </p:nvSpPr>
         <p:spPr/>
@@ -1256,7 +1112,7 @@
 </file>
 
 <file path=ppt/notesSlides/notesSlide4.xml><?xml version="1.0" encoding="utf-8"?>
-<p:notes xmlns:a="http://schemas.openxmlformats.org/drawingml/2006/main" xmlns:p="http://schemas.openxmlformats.org/presentationml/2006/main" xmlns:r="http://schemas.openxmlformats.org/officeDocument/2006/relationships">
+<p:notes xmlns:a="http://schemas.openxmlformats.org/drawingml/2006/main" xmlns:r="http://schemas.openxmlformats.org/officeDocument/2006/relationships" xmlns:p="http://schemas.openxmlformats.org/presentationml/2006/main">
   <p:cSld>
     <p:spTree>
       <p:nvGrpSpPr>
@@ -1276,7 +1132,7 @@
         <p:nvSpPr>
           <p:cNvPr id="2" name="Slide Image Placeholder 1"/>
           <p:cNvSpPr>
-            <a:spLocks noGrp="1"/>
+            <a:spLocks noGrp="1" noRot="1" noChangeAspect="1"/>
           </p:cNvSpPr>
           <p:nvPr>
             <p:ph type="sldImg" idx="2"/>
@@ -1291,7 +1147,7 @@
             <a:spLocks noGrp="1"/>
           </p:cNvSpPr>
           <p:nvPr>
-            <p:ph type="body" idx="3" sz="quarter"/>
+            <p:ph type="body" sz="quarter" idx="3"/>
           </p:nvPr>
         </p:nvSpPr>
         <p:spPr/>
@@ -1303,13 +1159,17 @@
               <a:t>SLIDE 4 — INTRODUCING ONEMEMBER  (Target: 2 min)</a:t>
             </a:r>
           </a:p>
-          <a:p/>
+          <a:p>
+            <a:endParaRPr/>
+          </a:p>
           <a:p>
             <a:r>
               <a:t>Five pillars — ACQUIRE, RETAIN, REWARD, UNDERSTAND, GROW.</a:t>
             </a:r>
           </a:p>
-          <a:p/>
+          <a:p>
+            <a:endParaRPr/>
+          </a:p>
           <a:p>
             <a:r>
               <a:t>• ACQUIRE — QR scan, digital membership, zero friction</a:t>
@@ -1335,13 +1195,17 @@
               <a:t>• GROW — data-driven campaigns, segment targeting</a:t>
             </a:r>
           </a:p>
-          <a:p/>
+          <a:p>
+            <a:endParaRPr/>
+          </a:p>
           <a:p>
             <a:r>
               <a:t>Positioning: "We are not a loyalty app. We are a merchant growth platform."</a:t>
             </a:r>
           </a:p>
-          <a:p/>
+          <a:p>
+            <a:endParaRPr/>
+          </a:p>
         </p:txBody>
       </p:sp>
       <p:sp>
@@ -1351,7 +1215,7 @@
             <a:spLocks noGrp="1"/>
           </p:cNvSpPr>
           <p:nvPr>
-            <p:ph type="sldNum" idx="5" sz="quarter"/>
+            <p:ph type="sldNum" sz="quarter" idx="5"/>
           </p:nvPr>
         </p:nvSpPr>
         <p:spPr/>
@@ -1365,7 +1229,7 @@
 </file>
 
 <file path=ppt/notesSlides/notesSlide5.xml><?xml version="1.0" encoding="utf-8"?>
-<p:notes xmlns:a="http://schemas.openxmlformats.org/drawingml/2006/main" xmlns:p="http://schemas.openxmlformats.org/presentationml/2006/main" xmlns:r="http://schemas.openxmlformats.org/officeDocument/2006/relationships">
+<p:notes xmlns:a="http://schemas.openxmlformats.org/drawingml/2006/main" xmlns:r="http://schemas.openxmlformats.org/officeDocument/2006/relationships" xmlns:p="http://schemas.openxmlformats.org/presentationml/2006/main">
   <p:cSld>
     <p:spTree>
       <p:nvGrpSpPr>
@@ -1385,7 +1249,7 @@
         <p:nvSpPr>
           <p:cNvPr id="2" name="Slide Image Placeholder 1"/>
           <p:cNvSpPr>
-            <a:spLocks noGrp="1"/>
+            <a:spLocks noGrp="1" noRot="1" noChangeAspect="1"/>
           </p:cNvSpPr>
           <p:nvPr>
             <p:ph type="sldImg" idx="2"/>
@@ -1400,7 +1264,7 @@
             <a:spLocks noGrp="1"/>
           </p:cNvSpPr>
           <p:nvPr>
-            <p:ph type="body" idx="3" sz="quarter"/>
+            <p:ph type="body" sz="quarter" idx="3"/>
           </p:nvPr>
         </p:nvSpPr>
         <p:spPr/>
@@ -1412,13 +1276,17 @@
               <a:t>SLIDE 5 — MERCHANT JOURNEY  (Target: 2 min)</a:t>
             </a:r>
           </a:p>
-          <a:p/>
+          <a:p>
+            <a:endParaRPr/>
+          </a:p>
           <a:p>
             <a:r>
               <a:t>Walk each step. Make it feel achievable.</a:t>
             </a:r>
           </a:p>
-          <a:p/>
+          <a:p>
+            <a:endParaRPr/>
+          </a:p>
           <a:p>
             <a:r>
               <a:t>1. Register — 5 minutes, no contract</a:t>
@@ -1449,13 +1317,17 @@
               <a:t>6. Grow — use insights to run targeted campaigns and win-backs</a:t>
             </a:r>
           </a:p>
-          <a:p/>
+          <a:p>
+            <a:endParaRPr/>
+          </a:p>
           <a:p>
             <a:r>
               <a:t>ASK: "Which step feels most valuable for your business right now?"</a:t>
             </a:r>
           </a:p>
-          <a:p/>
+          <a:p>
+            <a:endParaRPr/>
+          </a:p>
         </p:txBody>
       </p:sp>
       <p:sp>
@@ -1465,7 +1337,7 @@
             <a:spLocks noGrp="1"/>
           </p:cNvSpPr>
           <p:nvPr>
-            <p:ph type="sldNum" idx="5" sz="quarter"/>
+            <p:ph type="sldNum" sz="quarter" idx="5"/>
           </p:nvPr>
         </p:nvSpPr>
         <p:spPr/>
@@ -1479,7 +1351,7 @@
 </file>
 
 <file path=ppt/notesSlides/notesSlide6.xml><?xml version="1.0" encoding="utf-8"?>
-<p:notes xmlns:a="http://schemas.openxmlformats.org/drawingml/2006/main" xmlns:p="http://schemas.openxmlformats.org/presentationml/2006/main" xmlns:r="http://schemas.openxmlformats.org/officeDocument/2006/relationships">
+<p:notes xmlns:a="http://schemas.openxmlformats.org/drawingml/2006/main" xmlns:r="http://schemas.openxmlformats.org/officeDocument/2006/relationships" xmlns:p="http://schemas.openxmlformats.org/presentationml/2006/main">
   <p:cSld>
     <p:spTree>
       <p:nvGrpSpPr>
@@ -1499,7 +1371,7 @@
         <p:nvSpPr>
           <p:cNvPr id="2" name="Slide Image Placeholder 1"/>
           <p:cNvSpPr>
-            <a:spLocks noGrp="1"/>
+            <a:spLocks noGrp="1" noRot="1" noChangeAspect="1"/>
           </p:cNvSpPr>
           <p:nvPr>
             <p:ph type="sldImg" idx="2"/>
@@ -1514,7 +1386,7 @@
             <a:spLocks noGrp="1"/>
           </p:cNvSpPr>
           <p:nvPr>
-            <p:ph type="body" idx="3" sz="quarter"/>
+            <p:ph type="body" sz="quarter" idx="3"/>
           </p:nvPr>
         </p:nvSpPr>
         <p:spPr/>
@@ -1526,13 +1398,17 @@
               <a:t>SLIDE 6 — CUSTOMER JOURNEY  (Target: 1 min)</a:t>
             </a:r>
           </a:p>
-          <a:p/>
+          <a:p>
+            <a:endParaRPr/>
+          </a:p>
           <a:p>
             <a:r>
               <a:t>Customer sign-up is designed to take under 30 seconds.</a:t>
             </a:r>
           </a:p>
-          <a:p/>
+          <a:p>
+            <a:endParaRPr/>
+          </a:p>
           <a:p>
             <a:r>
               <a:t>1. Visit — customer arrives</a:t>
@@ -1568,13 +1444,17 @@
               <a:t>7. Return — rewards drive repeat visits</a:t>
             </a:r>
           </a:p>
-          <a:p/>
+          <a:p>
+            <a:endParaRPr/>
+          </a:p>
           <a:p>
             <a:r>
               <a:t>North Star: "A customer can join in under 30 seconds."</a:t>
             </a:r>
           </a:p>
-          <a:p/>
+          <a:p>
+            <a:endParaRPr/>
+          </a:p>
         </p:txBody>
       </p:sp>
       <p:sp>
@@ -1584,7 +1464,7 @@
             <a:spLocks noGrp="1"/>
           </p:cNvSpPr>
           <p:nvPr>
-            <p:ph type="sldNum" idx="5" sz="quarter"/>
+            <p:ph type="sldNum" sz="quarter" idx="5"/>
           </p:nvPr>
         </p:nvSpPr>
         <p:spPr/>
@@ -1598,7 +1478,7 @@
 </file>
 
 <file path=ppt/notesSlides/notesSlide7.xml><?xml version="1.0" encoding="utf-8"?>
-<p:notes xmlns:a="http://schemas.openxmlformats.org/drawingml/2006/main" xmlns:p="http://schemas.openxmlformats.org/presentationml/2006/main" xmlns:r="http://schemas.openxmlformats.org/officeDocument/2006/relationships">
+<p:notes xmlns:a="http://schemas.openxmlformats.org/drawingml/2006/main" xmlns:r="http://schemas.openxmlformats.org/officeDocument/2006/relationships" xmlns:p="http://schemas.openxmlformats.org/presentationml/2006/main">
   <p:cSld>
     <p:spTree>
       <p:nvGrpSpPr>
@@ -1618,7 +1498,7 @@
         <p:nvSpPr>
           <p:cNvPr id="2" name="Slide Image Placeholder 1"/>
           <p:cNvSpPr>
-            <a:spLocks noGrp="1"/>
+            <a:spLocks noGrp="1" noRot="1" noChangeAspect="1"/>
           </p:cNvSpPr>
           <p:nvPr>
             <p:ph type="sldImg" idx="2"/>
@@ -1633,7 +1513,7 @@
             <a:spLocks noGrp="1"/>
           </p:cNvSpPr>
           <p:nvPr>
-            <p:ph type="body" idx="3" sz="quarter"/>
+            <p:ph type="body" sz="quarter" idx="3"/>
           </p:nvPr>
         </p:nvSpPr>
         <p:spPr/>
@@ -1645,31 +1525,41 @@
               <a:t>SLIDE 7 — COMPARISON  (Target: 2 min)</a:t>
             </a:r>
           </a:p>
-          <a:p/>
+          <a:p>
+            <a:endParaRPr/>
+          </a:p>
           <a:p>
             <a:r>
               <a:t>Handle objections before they arise.</a:t>
             </a:r>
           </a:p>
-          <a:p/>
+          <a:p>
+            <a:endParaRPr/>
+          </a:p>
           <a:p>
             <a:r>
               <a:t>Traditional: paper cards lost, no data, manual tracking, no automation, no analytics, high setup cost.</a:t>
             </a:r>
           </a:p>
-          <a:p/>
+          <a:p>
+            <a:endParaRPr/>
+          </a:p>
           <a:p>
             <a:r>
               <a:t>OneMember: digital on any phone, full profile from first scan, automatic tracking, automated birthday + win-back, real-time dashboard, affordable flat fee.</a:t>
             </a:r>
           </a:p>
-          <a:p/>
+          <a:p>
+            <a:endParaRPr/>
+          </a:p>
           <a:p>
             <a:r>
               <a:t>ASK: "If you could see every customer's visit history in one screen, how would that change the way you run promotions?"</a:t>
             </a:r>
           </a:p>
-          <a:p/>
+          <a:p>
+            <a:endParaRPr/>
+          </a:p>
         </p:txBody>
       </p:sp>
       <p:sp>
@@ -1679,7 +1569,7 @@
             <a:spLocks noGrp="1"/>
           </p:cNvSpPr>
           <p:nvPr>
-            <p:ph type="sldNum" idx="5" sz="quarter"/>
+            <p:ph type="sldNum" sz="quarter" idx="5"/>
           </p:nvPr>
         </p:nvSpPr>
         <p:spPr/>
@@ -1693,7 +1583,7 @@
 </file>
 
 <file path=ppt/notesSlides/notesSlide8.xml><?xml version="1.0" encoding="utf-8"?>
-<p:notes xmlns:a="http://schemas.openxmlformats.org/drawingml/2006/main" xmlns:p="http://schemas.openxmlformats.org/presentationml/2006/main" xmlns:r="http://schemas.openxmlformats.org/officeDocument/2006/relationships">
+<p:notes xmlns:a="http://schemas.openxmlformats.org/drawingml/2006/main" xmlns:r="http://schemas.openxmlformats.org/officeDocument/2006/relationships" xmlns:p="http://schemas.openxmlformats.org/presentationml/2006/main">
   <p:cSld>
     <p:spTree>
       <p:nvGrpSpPr>
@@ -1713,7 +1603,7 @@
         <p:nvSpPr>
           <p:cNvPr id="2" name="Slide Image Placeholder 1"/>
           <p:cNvSpPr>
-            <a:spLocks noGrp="1"/>
+            <a:spLocks noGrp="1" noRot="1" noChangeAspect="1"/>
           </p:cNvSpPr>
           <p:nvPr>
             <p:ph type="sldImg" idx="2"/>
@@ -1728,7 +1618,7 @@
             <a:spLocks noGrp="1"/>
           </p:cNvSpPr>
           <p:nvPr>
-            <p:ph type="body" idx="3" sz="quarter"/>
+            <p:ph type="body" sz="quarter" idx="3"/>
           </p:nvPr>
         </p:nvSpPr>
         <p:spPr/>
@@ -1740,13 +1630,17 @@
               <a:t>SLIDE 8 — MERCHANT BENEFITS  (Target: 1 min)</a:t>
             </a:r>
           </a:p>
-          <a:p/>
+          <a:p>
+            <a:endParaRPr/>
+          </a:p>
           <a:p>
             <a:r>
               <a:t>Connect each benefit to a pain point.</a:t>
             </a:r>
           </a:p>
-          <a:p/>
+          <a:p>
+            <a:endParaRPr/>
+          </a:p>
           <a:p>
             <a:r>
               <a:t>1. Grow member database automatically on every visit</a:t>
@@ -1787,7 +1681,9 @@
               <a:t>8. Setup in under 10 minutes — no IT team needed</a:t>
             </a:r>
           </a:p>
-          <a:p/>
+          <a:p>
+            <a:endParaRPr/>
+          </a:p>
         </p:txBody>
       </p:sp>
       <p:sp>
@@ -1797,7 +1693,7 @@
             <a:spLocks noGrp="1"/>
           </p:cNvSpPr>
           <p:nvPr>
-            <p:ph type="sldNum" idx="5" sz="quarter"/>
+            <p:ph type="sldNum" sz="quarter" idx="5"/>
           </p:nvPr>
         </p:nvSpPr>
         <p:spPr/>
@@ -1811,7 +1707,7 @@
 </file>
 
 <file path=ppt/notesSlides/notesSlide9.xml><?xml version="1.0" encoding="utf-8"?>
-<p:notes xmlns:a="http://schemas.openxmlformats.org/drawingml/2006/main" xmlns:p="http://schemas.openxmlformats.org/presentationml/2006/main" xmlns:r="http://schemas.openxmlformats.org/officeDocument/2006/relationships">
+<p:notes xmlns:a="http://schemas.openxmlformats.org/drawingml/2006/main" xmlns:r="http://schemas.openxmlformats.org/officeDocument/2006/relationships" xmlns:p="http://schemas.openxmlformats.org/presentationml/2006/main">
   <p:cSld>
     <p:spTree>
       <p:nvGrpSpPr>
@@ -1831,7 +1727,7 @@
         <p:nvSpPr>
           <p:cNvPr id="2" name="Slide Image Placeholder 1"/>
           <p:cNvSpPr>
-            <a:spLocks noGrp="1"/>
+            <a:spLocks noGrp="1" noRot="1" noChangeAspect="1"/>
           </p:cNvSpPr>
           <p:nvPr>
             <p:ph type="sldImg" idx="2"/>
@@ -1846,7 +1742,7 @@
             <a:spLocks noGrp="1"/>
           </p:cNvSpPr>
           <p:nvPr>
-            <p:ph type="body" idx="3" sz="quarter"/>
+            <p:ph type="body" sz="quarter" idx="3"/>
           </p:nvPr>
         </p:nvSpPr>
         <p:spPr/>
@@ -1858,13 +1754,17 @@
               <a:t>SLIDE 9 — CUSTOMER BENEFITS  (Target: 1 min)</a:t>
             </a:r>
           </a:p>
-          <a:p/>
+          <a:p>
+            <a:endParaRPr/>
+          </a:p>
           <a:p>
             <a:r>
               <a:t>A great customer experience drives merchant adoption.</a:t>
             </a:r>
           </a:p>
-          <a:p/>
+          <a:p>
+            <a:endParaRPr/>
+          </a:p>
           <a:p>
             <a:r>
               <a:t>1. No app download — runs in any mobile browser</a:t>
@@ -1905,7 +1805,9 @@
               <a:t>8. Digital card — can never be lost or forgotten</a:t>
             </a:r>
           </a:p>
-          <a:p/>
+          <a:p>
+            <a:endParaRPr/>
+          </a:p>
         </p:txBody>
       </p:sp>
       <p:sp>
@@ -1915,7 +1817,7 @@
             <a:spLocks noGrp="1"/>
           </p:cNvSpPr>
           <p:nvPr>
-            <p:ph type="sldNum" idx="5" sz="quarter"/>
+            <p:ph type="sldNum" sz="quarter" idx="5"/>
           </p:nvPr>
         </p:nvSpPr>
         <p:spPr/>
@@ -1966,10 +1868,9 @@
           <a:lstStyle/>
           <a:p>
             <a:r>
-              <a:rPr lang="en-US" smtClean="0"/>
+              <a:rPr lang="en-US"/>
               <a:t>Click to edit Master title style</a:t>
             </a:r>
-            <a:endParaRPr lang="en-US"/>
           </a:p>
         </p:txBody>
       </p:sp>
@@ -2085,10 +1986,9 @@
           </a:lstStyle>
           <a:p>
             <a:r>
-              <a:rPr lang="en-US" smtClean="0"/>
+              <a:rPr lang="en-US"/>
               <a:t>Click to edit Master subtitle style</a:t>
             </a:r>
-            <a:endParaRPr lang="en-US"/>
           </a:p>
         </p:txBody>
       </p:sp>
@@ -2109,7 +2009,7 @@
           <a:p>
             <a:fld id="{5BCAD085-E8A6-8845-BD4E-CB4CCA059FC4}" type="datetimeFigureOut">
               <a:rPr lang="en-US" smtClean="0"/>
-              <a:t>1/27/13</a:t>
+              <a:t>7/2/26</a:t>
             </a:fld>
             <a:endParaRPr lang="en-US"/>
           </a:p>
@@ -2203,10 +2103,9 @@
           <a:lstStyle/>
           <a:p>
             <a:r>
-              <a:rPr lang="en-US" smtClean="0"/>
+              <a:rPr lang="en-US"/>
               <a:t>Click to edit Master title style</a:t>
             </a:r>
-            <a:endParaRPr lang="en-US"/>
           </a:p>
         </p:txBody>
       </p:sp>
@@ -2227,38 +2126,37 @@
           <a:p>
             <a:pPr lvl="0"/>
             <a:r>
-              <a:rPr lang="en-US" smtClean="0"/>
+              <a:rPr lang="en-US"/>
               <a:t>Click to edit Master text styles</a:t>
             </a:r>
           </a:p>
           <a:p>
             <a:pPr lvl="1"/>
             <a:r>
-              <a:rPr lang="en-US" smtClean="0"/>
+              <a:rPr lang="en-US"/>
               <a:t>Second level</a:t>
             </a:r>
           </a:p>
           <a:p>
             <a:pPr lvl="2"/>
             <a:r>
-              <a:rPr lang="en-US" smtClean="0"/>
+              <a:rPr lang="en-US"/>
               <a:t>Third level</a:t>
             </a:r>
           </a:p>
           <a:p>
             <a:pPr lvl="3"/>
             <a:r>
-              <a:rPr lang="en-US" smtClean="0"/>
+              <a:rPr lang="en-US"/>
               <a:t>Fourth level</a:t>
             </a:r>
           </a:p>
           <a:p>
             <a:pPr lvl="4"/>
             <a:r>
-              <a:rPr lang="en-US" smtClean="0"/>
+              <a:rPr lang="en-US"/>
               <a:t>Fifth level</a:t>
             </a:r>
-            <a:endParaRPr lang="en-US"/>
           </a:p>
         </p:txBody>
       </p:sp>
@@ -2279,7 +2177,7 @@
           <a:p>
             <a:fld id="{5BCAD085-E8A6-8845-BD4E-CB4CCA059FC4}" type="datetimeFigureOut">
               <a:rPr lang="en-US" smtClean="0"/>
-              <a:t>1/27/13</a:t>
+              <a:t>7/2/26</a:t>
             </a:fld>
             <a:endParaRPr lang="en-US"/>
           </a:p>
@@ -2378,10 +2276,9 @@
           <a:lstStyle/>
           <a:p>
             <a:r>
-              <a:rPr lang="en-US" smtClean="0"/>
+              <a:rPr lang="en-US"/>
               <a:t>Click to edit Master title style</a:t>
             </a:r>
-            <a:endParaRPr lang="en-US"/>
           </a:p>
         </p:txBody>
       </p:sp>
@@ -2407,38 +2304,37 @@
           <a:p>
             <a:pPr lvl="0"/>
             <a:r>
-              <a:rPr lang="en-US" smtClean="0"/>
+              <a:rPr lang="en-US"/>
               <a:t>Click to edit Master text styles</a:t>
             </a:r>
           </a:p>
           <a:p>
             <a:pPr lvl="1"/>
             <a:r>
-              <a:rPr lang="en-US" smtClean="0"/>
+              <a:rPr lang="en-US"/>
               <a:t>Second level</a:t>
             </a:r>
           </a:p>
           <a:p>
             <a:pPr lvl="2"/>
             <a:r>
-              <a:rPr lang="en-US" smtClean="0"/>
+              <a:rPr lang="en-US"/>
               <a:t>Third level</a:t>
             </a:r>
           </a:p>
           <a:p>
             <a:pPr lvl="3"/>
             <a:r>
-              <a:rPr lang="en-US" smtClean="0"/>
+              <a:rPr lang="en-US"/>
               <a:t>Fourth level</a:t>
             </a:r>
           </a:p>
           <a:p>
             <a:pPr lvl="4"/>
             <a:r>
-              <a:rPr lang="en-US" smtClean="0"/>
+              <a:rPr lang="en-US"/>
               <a:t>Fifth level</a:t>
             </a:r>
-            <a:endParaRPr lang="en-US"/>
           </a:p>
         </p:txBody>
       </p:sp>
@@ -2459,7 +2355,7 @@
           <a:p>
             <a:fld id="{5BCAD085-E8A6-8845-BD4E-CB4CCA059FC4}" type="datetimeFigureOut">
               <a:rPr lang="en-US" smtClean="0"/>
-              <a:t>1/27/13</a:t>
+              <a:t>7/2/26</a:t>
             </a:fld>
             <a:endParaRPr lang="en-US"/>
           </a:p>
@@ -2553,10 +2449,9 @@
           <a:lstStyle/>
           <a:p>
             <a:r>
-              <a:rPr lang="en-US" smtClean="0"/>
+              <a:rPr lang="en-US"/>
               <a:t>Click to edit Master title style</a:t>
             </a:r>
-            <a:endParaRPr lang="en-US"/>
           </a:p>
         </p:txBody>
       </p:sp>
@@ -2577,38 +2472,37 @@
           <a:p>
             <a:pPr lvl="0"/>
             <a:r>
-              <a:rPr lang="en-US" smtClean="0"/>
+              <a:rPr lang="en-US"/>
               <a:t>Click to edit Master text styles</a:t>
             </a:r>
           </a:p>
           <a:p>
             <a:pPr lvl="1"/>
             <a:r>
-              <a:rPr lang="en-US" smtClean="0"/>
+              <a:rPr lang="en-US"/>
               <a:t>Second level</a:t>
             </a:r>
           </a:p>
           <a:p>
             <a:pPr lvl="2"/>
             <a:r>
-              <a:rPr lang="en-US" smtClean="0"/>
+              <a:rPr lang="en-US"/>
               <a:t>Third level</a:t>
             </a:r>
           </a:p>
           <a:p>
             <a:pPr lvl="3"/>
             <a:r>
-              <a:rPr lang="en-US" smtClean="0"/>
+              <a:rPr lang="en-US"/>
               <a:t>Fourth level</a:t>
             </a:r>
           </a:p>
           <a:p>
             <a:pPr lvl="4"/>
             <a:r>
-              <a:rPr lang="en-US" smtClean="0"/>
+              <a:rPr lang="en-US"/>
               <a:t>Fifth level</a:t>
             </a:r>
-            <a:endParaRPr lang="en-US"/>
           </a:p>
         </p:txBody>
       </p:sp>
@@ -2629,7 +2523,7 @@
           <a:p>
             <a:fld id="{5BCAD085-E8A6-8845-BD4E-CB4CCA059FC4}" type="datetimeFigureOut">
               <a:rPr lang="en-US" smtClean="0"/>
-              <a:t>1/27/13</a:t>
+              <a:t>7/2/26</a:t>
             </a:fld>
             <a:endParaRPr lang="en-US"/>
           </a:p>
@@ -2732,10 +2626,9 @@
           </a:lstStyle>
           <a:p>
             <a:r>
-              <a:rPr lang="en-US" smtClean="0"/>
+              <a:rPr lang="en-US"/>
               <a:t>Click to edit Master title style</a:t>
             </a:r>
-            <a:endParaRPr lang="en-US"/>
           </a:p>
         </p:txBody>
       </p:sp>
@@ -2852,7 +2745,7 @@
           <a:p>
             <a:pPr lvl="0"/>
             <a:r>
-              <a:rPr lang="en-US" smtClean="0"/>
+              <a:rPr lang="en-US"/>
               <a:t>Click to edit Master text styles</a:t>
             </a:r>
           </a:p>
@@ -2875,7 +2768,7 @@
           <a:p>
             <a:fld id="{5BCAD085-E8A6-8845-BD4E-CB4CCA059FC4}" type="datetimeFigureOut">
               <a:rPr lang="en-US" smtClean="0"/>
-              <a:t>1/27/13</a:t>
+              <a:t>7/2/26</a:t>
             </a:fld>
             <a:endParaRPr lang="en-US"/>
           </a:p>
@@ -2969,10 +2862,9 @@
           <a:lstStyle/>
           <a:p>
             <a:r>
-              <a:rPr lang="en-US" smtClean="0"/>
+              <a:rPr lang="en-US"/>
               <a:t>Click to edit Master title style</a:t>
             </a:r>
-            <a:endParaRPr lang="en-US"/>
           </a:p>
         </p:txBody>
       </p:sp>
@@ -3026,38 +2918,37 @@
           <a:p>
             <a:pPr lvl="0"/>
             <a:r>
-              <a:rPr lang="en-US" smtClean="0"/>
+              <a:rPr lang="en-US"/>
               <a:t>Click to edit Master text styles</a:t>
             </a:r>
           </a:p>
           <a:p>
             <a:pPr lvl="1"/>
             <a:r>
-              <a:rPr lang="en-US" smtClean="0"/>
+              <a:rPr lang="en-US"/>
               <a:t>Second level</a:t>
             </a:r>
           </a:p>
           <a:p>
             <a:pPr lvl="2"/>
             <a:r>
-              <a:rPr lang="en-US" smtClean="0"/>
+              <a:rPr lang="en-US"/>
               <a:t>Third level</a:t>
             </a:r>
           </a:p>
           <a:p>
             <a:pPr lvl="3"/>
             <a:r>
-              <a:rPr lang="en-US" smtClean="0"/>
+              <a:rPr lang="en-US"/>
               <a:t>Fourth level</a:t>
             </a:r>
           </a:p>
           <a:p>
             <a:pPr lvl="4"/>
             <a:r>
-              <a:rPr lang="en-US" smtClean="0"/>
+              <a:rPr lang="en-US"/>
               <a:t>Fifth level</a:t>
             </a:r>
-            <a:endParaRPr lang="en-US"/>
           </a:p>
         </p:txBody>
       </p:sp>
@@ -3111,38 +3002,37 @@
           <a:p>
             <a:pPr lvl="0"/>
             <a:r>
-              <a:rPr lang="en-US" smtClean="0"/>
+              <a:rPr lang="en-US"/>
               <a:t>Click to edit Master text styles</a:t>
             </a:r>
           </a:p>
           <a:p>
             <a:pPr lvl="1"/>
             <a:r>
-              <a:rPr lang="en-US" smtClean="0"/>
+              <a:rPr lang="en-US"/>
               <a:t>Second level</a:t>
             </a:r>
           </a:p>
           <a:p>
             <a:pPr lvl="2"/>
             <a:r>
-              <a:rPr lang="en-US" smtClean="0"/>
+              <a:rPr lang="en-US"/>
               <a:t>Third level</a:t>
             </a:r>
           </a:p>
           <a:p>
             <a:pPr lvl="3"/>
             <a:r>
-              <a:rPr lang="en-US" smtClean="0"/>
+              <a:rPr lang="en-US"/>
               <a:t>Fourth level</a:t>
             </a:r>
           </a:p>
           <a:p>
             <a:pPr lvl="4"/>
             <a:r>
-              <a:rPr lang="en-US" smtClean="0"/>
+              <a:rPr lang="en-US"/>
               <a:t>Fifth level</a:t>
             </a:r>
-            <a:endParaRPr lang="en-US"/>
           </a:p>
         </p:txBody>
       </p:sp>
@@ -3163,7 +3053,7 @@
           <a:p>
             <a:fld id="{5BCAD085-E8A6-8845-BD4E-CB4CCA059FC4}" type="datetimeFigureOut">
               <a:rPr lang="en-US" smtClean="0"/>
-              <a:t>1/27/13</a:t>
+              <a:t>7/2/26</a:t>
             </a:fld>
             <a:endParaRPr lang="en-US"/>
           </a:p>
@@ -3261,10 +3151,9 @@
           </a:lstStyle>
           <a:p>
             <a:r>
-              <a:rPr lang="en-US" smtClean="0"/>
+              <a:rPr lang="en-US"/>
               <a:t>Click to edit Master title style</a:t>
             </a:r>
-            <a:endParaRPr lang="en-US"/>
           </a:p>
         </p:txBody>
       </p:sp>
@@ -3327,7 +3216,7 @@
           <a:p>
             <a:pPr lvl="0"/>
             <a:r>
-              <a:rPr lang="en-US" smtClean="0"/>
+              <a:rPr lang="en-US"/>
               <a:t>Click to edit Master text styles</a:t>
             </a:r>
           </a:p>
@@ -3383,38 +3272,37 @@
           <a:p>
             <a:pPr lvl="0"/>
             <a:r>
-              <a:rPr lang="en-US" smtClean="0"/>
+              <a:rPr lang="en-US"/>
               <a:t>Click to edit Master text styles</a:t>
             </a:r>
           </a:p>
           <a:p>
             <a:pPr lvl="1"/>
             <a:r>
-              <a:rPr lang="en-US" smtClean="0"/>
+              <a:rPr lang="en-US"/>
               <a:t>Second level</a:t>
             </a:r>
           </a:p>
           <a:p>
             <a:pPr lvl="2"/>
             <a:r>
-              <a:rPr lang="en-US" smtClean="0"/>
+              <a:rPr lang="en-US"/>
               <a:t>Third level</a:t>
             </a:r>
           </a:p>
           <a:p>
             <a:pPr lvl="3"/>
             <a:r>
-              <a:rPr lang="en-US" smtClean="0"/>
+              <a:rPr lang="en-US"/>
               <a:t>Fourth level</a:t>
             </a:r>
           </a:p>
           <a:p>
             <a:pPr lvl="4"/>
             <a:r>
-              <a:rPr lang="en-US" smtClean="0"/>
+              <a:rPr lang="en-US"/>
               <a:t>Fifth level</a:t>
             </a:r>
-            <a:endParaRPr lang="en-US"/>
           </a:p>
         </p:txBody>
       </p:sp>
@@ -3477,7 +3365,7 @@
           <a:p>
             <a:pPr lvl="0"/>
             <a:r>
-              <a:rPr lang="en-US" smtClean="0"/>
+              <a:rPr lang="en-US"/>
               <a:t>Click to edit Master text styles</a:t>
             </a:r>
           </a:p>
@@ -3533,38 +3421,37 @@
           <a:p>
             <a:pPr lvl="0"/>
             <a:r>
-              <a:rPr lang="en-US" smtClean="0"/>
+              <a:rPr lang="en-US"/>
               <a:t>Click to edit Master text styles</a:t>
             </a:r>
           </a:p>
           <a:p>
             <a:pPr lvl="1"/>
             <a:r>
-              <a:rPr lang="en-US" smtClean="0"/>
+              <a:rPr lang="en-US"/>
               <a:t>Second level</a:t>
             </a:r>
           </a:p>
           <a:p>
             <a:pPr lvl="2"/>
             <a:r>
-              <a:rPr lang="en-US" smtClean="0"/>
+              <a:rPr lang="en-US"/>
               <a:t>Third level</a:t>
             </a:r>
           </a:p>
           <a:p>
             <a:pPr lvl="3"/>
             <a:r>
-              <a:rPr lang="en-US" smtClean="0"/>
+              <a:rPr lang="en-US"/>
               <a:t>Fourth level</a:t>
             </a:r>
           </a:p>
           <a:p>
             <a:pPr lvl="4"/>
             <a:r>
-              <a:rPr lang="en-US" smtClean="0"/>
+              <a:rPr lang="en-US"/>
               <a:t>Fifth level</a:t>
             </a:r>
-            <a:endParaRPr lang="en-US"/>
           </a:p>
         </p:txBody>
       </p:sp>
@@ -3585,7 +3472,7 @@
           <a:p>
             <a:fld id="{5BCAD085-E8A6-8845-BD4E-CB4CCA059FC4}" type="datetimeFigureOut">
               <a:rPr lang="en-US" smtClean="0"/>
-              <a:t>1/27/13</a:t>
+              <a:t>7/2/26</a:t>
             </a:fld>
             <a:endParaRPr lang="en-US"/>
           </a:p>
@@ -3679,10 +3566,9 @@
           <a:lstStyle/>
           <a:p>
             <a:r>
-              <a:rPr lang="en-US" smtClean="0"/>
+              <a:rPr lang="en-US"/>
               <a:t>Click to edit Master title style</a:t>
             </a:r>
-            <a:endParaRPr lang="en-US"/>
           </a:p>
         </p:txBody>
       </p:sp>
@@ -3703,7 +3589,7 @@
           <a:p>
             <a:fld id="{5BCAD085-E8A6-8845-BD4E-CB4CCA059FC4}" type="datetimeFigureOut">
               <a:rPr lang="en-US" smtClean="0"/>
-              <a:t>1/27/13</a:t>
+              <a:t>7/2/26</a:t>
             </a:fld>
             <a:endParaRPr lang="en-US"/>
           </a:p>
@@ -3798,7 +3684,7 @@
           <a:p>
             <a:fld id="{5BCAD085-E8A6-8845-BD4E-CB4CCA059FC4}" type="datetimeFigureOut">
               <a:rPr lang="en-US" smtClean="0"/>
-              <a:t>1/27/13</a:t>
+              <a:t>7/2/26</a:t>
             </a:fld>
             <a:endParaRPr lang="en-US"/>
           </a:p>
@@ -3901,10 +3787,9 @@
           </a:lstStyle>
           <a:p>
             <a:r>
-              <a:rPr lang="en-US" smtClean="0"/>
+              <a:rPr lang="en-US"/>
               <a:t>Click to edit Master title style</a:t>
             </a:r>
-            <a:endParaRPr lang="en-US"/>
           </a:p>
         </p:txBody>
       </p:sp>
@@ -3958,38 +3843,37 @@
           <a:p>
             <a:pPr lvl="0"/>
             <a:r>
-              <a:rPr lang="en-US" smtClean="0"/>
+              <a:rPr lang="en-US"/>
               <a:t>Click to edit Master text styles</a:t>
             </a:r>
           </a:p>
           <a:p>
             <a:pPr lvl="1"/>
             <a:r>
-              <a:rPr lang="en-US" smtClean="0"/>
+              <a:rPr lang="en-US"/>
               <a:t>Second level</a:t>
             </a:r>
           </a:p>
           <a:p>
             <a:pPr lvl="2"/>
             <a:r>
-              <a:rPr lang="en-US" smtClean="0"/>
+              <a:rPr lang="en-US"/>
               <a:t>Third level</a:t>
             </a:r>
           </a:p>
           <a:p>
             <a:pPr lvl="3"/>
             <a:r>
-              <a:rPr lang="en-US" smtClean="0"/>
+              <a:rPr lang="en-US"/>
               <a:t>Fourth level</a:t>
             </a:r>
           </a:p>
           <a:p>
             <a:pPr lvl="4"/>
             <a:r>
-              <a:rPr lang="en-US" smtClean="0"/>
+              <a:rPr lang="en-US"/>
               <a:t>Fifth level</a:t>
             </a:r>
-            <a:endParaRPr lang="en-US"/>
           </a:p>
         </p:txBody>
       </p:sp>
@@ -4052,7 +3936,7 @@
           <a:p>
             <a:pPr lvl="0"/>
             <a:r>
-              <a:rPr lang="en-US" smtClean="0"/>
+              <a:rPr lang="en-US"/>
               <a:t>Click to edit Master text styles</a:t>
             </a:r>
           </a:p>
@@ -4075,7 +3959,7 @@
           <a:p>
             <a:fld id="{5BCAD085-E8A6-8845-BD4E-CB4CCA059FC4}" type="datetimeFigureOut">
               <a:rPr lang="en-US" smtClean="0"/>
-              <a:t>1/27/13</a:t>
+              <a:t>7/2/26</a:t>
             </a:fld>
             <a:endParaRPr lang="en-US"/>
           </a:p>
@@ -4178,10 +4062,9 @@
           </a:lstStyle>
           <a:p>
             <a:r>
-              <a:rPr lang="en-US" smtClean="0"/>
+              <a:rPr lang="en-US"/>
               <a:t>Click to edit Master title style</a:t>
             </a:r>
-            <a:endParaRPr lang="en-US"/>
           </a:p>
         </p:txBody>
       </p:sp>
@@ -4305,7 +4188,7 @@
           <a:p>
             <a:pPr lvl="0"/>
             <a:r>
-              <a:rPr lang="en-US" smtClean="0"/>
+              <a:rPr lang="en-US"/>
               <a:t>Click to edit Master text styles</a:t>
             </a:r>
           </a:p>
@@ -4328,7 +4211,7 @@
           <a:p>
             <a:fld id="{5BCAD085-E8A6-8845-BD4E-CB4CCA059FC4}" type="datetimeFigureOut">
               <a:rPr lang="en-US" smtClean="0"/>
-              <a:t>1/27/13</a:t>
+              <a:t>7/2/26</a:t>
             </a:fld>
             <a:endParaRPr lang="en-US"/>
           </a:p>
@@ -4437,10 +4320,9 @@
           <a:lstStyle/>
           <a:p>
             <a:r>
-              <a:rPr lang="en-US" smtClean="0"/>
+              <a:rPr lang="en-US"/>
               <a:t>Click to edit Master title style</a:t>
             </a:r>
-            <a:endParaRPr lang="en-US"/>
           </a:p>
         </p:txBody>
       </p:sp>
@@ -4471,38 +4353,37 @@
           <a:p>
             <a:pPr lvl="0"/>
             <a:r>
-              <a:rPr lang="en-US" smtClean="0"/>
+              <a:rPr lang="en-US"/>
               <a:t>Click to edit Master text styles</a:t>
             </a:r>
           </a:p>
           <a:p>
             <a:pPr lvl="1"/>
             <a:r>
-              <a:rPr lang="en-US" smtClean="0"/>
+              <a:rPr lang="en-US"/>
               <a:t>Second level</a:t>
             </a:r>
           </a:p>
           <a:p>
             <a:pPr lvl="2"/>
             <a:r>
-              <a:rPr lang="en-US" smtClean="0"/>
+              <a:rPr lang="en-US"/>
               <a:t>Third level</a:t>
             </a:r>
           </a:p>
           <a:p>
             <a:pPr lvl="3"/>
             <a:r>
-              <a:rPr lang="en-US" smtClean="0"/>
+              <a:rPr lang="en-US"/>
               <a:t>Fourth level</a:t>
             </a:r>
           </a:p>
           <a:p>
             <a:pPr lvl="4"/>
             <a:r>
-              <a:rPr lang="en-US" smtClean="0"/>
+              <a:rPr lang="en-US"/>
               <a:t>Fifth level</a:t>
             </a:r>
-            <a:endParaRPr lang="en-US"/>
           </a:p>
         </p:txBody>
       </p:sp>
@@ -4541,7 +4422,7 @@
           <a:p>
             <a:fld id="{5BCAD085-E8A6-8845-BD4E-CB4CCA059FC4}" type="datetimeFigureOut">
               <a:rPr lang="en-US" smtClean="0"/>
-              <a:t>1/27/13</a:t>
+              <a:t>7/2/26</a:t>
             </a:fld>
             <a:endParaRPr lang="en-US"/>
           </a:p>
@@ -4900,7 +4781,7 @@
 </file>
 
 <file path=ppt/slides/slide1.xml><?xml version="1.0" encoding="utf-8"?>
-<p:sld xmlns:a="http://schemas.openxmlformats.org/drawingml/2006/main" xmlns:p="http://schemas.openxmlformats.org/presentationml/2006/main" xmlns:r="http://schemas.openxmlformats.org/officeDocument/2006/relationships">
+<p:sld xmlns:a="http://schemas.openxmlformats.org/drawingml/2006/main" xmlns:r="http://schemas.openxmlformats.org/officeDocument/2006/relationships" xmlns:p="http://schemas.openxmlformats.org/presentationml/2006/main">
   <p:cSld>
     <p:bg>
       <p:bgPr>
@@ -4916,7 +4797,14 @@
         <p:cNvGrpSpPr/>
         <p:nvPr/>
       </p:nvGrpSpPr>
-      <p:grpSpPr/>
+      <p:grpSpPr>
+        <a:xfrm>
+          <a:off x="0" y="0"/>
+          <a:ext cx="0" cy="0"/>
+          <a:chOff x="0" y="0"/>
+          <a:chExt cx="0" cy="0"/>
+        </a:xfrm>
+      </p:grpSpPr>
       <p:sp>
         <p:nvSpPr>
           <p:cNvPr id="2" name="Rectangle 1"/>
@@ -4957,6 +4845,7 @@
           <a:lstStyle/>
           <a:p>
             <a:pPr algn="ctr"/>
+            <a:endParaRPr/>
           </a:p>
         </p:txBody>
       </p:sp>
@@ -4968,7 +4857,7 @@
         </p:nvSpPr>
         <p:spPr>
           <a:xfrm>
-            <a:off x="1463040" y="1371600"/>
+            <a:off x="1188720" y="987552"/>
             <a:ext cx="5486400" cy="822960"/>
           </a:xfrm>
           <a:prstGeom prst="rect">
@@ -4984,7 +4873,7 @@
           <a:p>
             <a:pPr algn="l"/>
             <a:r>
-              <a:rPr sz="7200" b="1">
+              <a:rPr sz="7200" b="1" dirty="0" err="1">
                 <a:solidFill>
                   <a:srgbClr val="FF1585"/>
                 </a:solidFill>
@@ -4993,7 +4882,7 @@
               <a:t>one</a:t>
             </a:r>
             <a:r>
-              <a:rPr sz="7200" b="1">
+              <a:rPr sz="7200" b="1" dirty="0" err="1">
                 <a:solidFill>
                   <a:srgbClr val="FFFFFF"/>
                 </a:solidFill>
@@ -5001,6 +4890,12 @@
               </a:rPr>
               <a:t>member</a:t>
             </a:r>
+            <a:endParaRPr sz="7200" b="1" dirty="0">
+              <a:solidFill>
+                <a:srgbClr val="FFFFFF"/>
+              </a:solidFill>
+              <a:latin typeface="Arial"/>
+            </a:endParaRPr>
           </a:p>
         </p:txBody>
       </p:sp>
@@ -5044,6 +4939,7 @@
           <a:lstStyle/>
           <a:p>
             <a:pPr algn="ctr"/>
+            <a:endParaRPr/>
           </a:p>
         </p:txBody>
       </p:sp>
@@ -5122,6 +5018,7 @@
           <a:lstStyle/>
           <a:p>
             <a:pPr algn="ctr"/>
+            <a:endParaRPr/>
           </a:p>
         </p:txBody>
       </p:sp>
@@ -5235,6 +5132,7 @@
           <a:lstStyle/>
           <a:p>
             <a:pPr algn="ctr"/>
+            <a:endParaRPr/>
           </a:p>
         </p:txBody>
       </p:sp>
@@ -5313,6 +5211,7 @@
           <a:lstStyle/>
           <a:p>
             <a:pPr algn="ctr"/>
+            <a:endParaRPr/>
           </a:p>
         </p:txBody>
       </p:sp>
@@ -5391,6 +5290,7 @@
           <a:lstStyle/>
           <a:p>
             <a:pPr algn="ctr"/>
+            <a:endParaRPr/>
           </a:p>
         </p:txBody>
       </p:sp>
@@ -5469,6 +5369,7 @@
           <a:lstStyle/>
           <a:p>
             <a:pPr algn="ctr"/>
+            <a:endParaRPr/>
           </a:p>
         </p:txBody>
       </p:sp>
@@ -5551,7 +5452,7 @@
 </file>
 
 <file path=ppt/slides/slide10.xml><?xml version="1.0" encoding="utf-8"?>
-<p:sld xmlns:a="http://schemas.openxmlformats.org/drawingml/2006/main" xmlns:p="http://schemas.openxmlformats.org/presentationml/2006/main" xmlns:r="http://schemas.openxmlformats.org/officeDocument/2006/relationships">
+<p:sld xmlns:a="http://schemas.openxmlformats.org/drawingml/2006/main" xmlns:r="http://schemas.openxmlformats.org/officeDocument/2006/relationships" xmlns:p="http://schemas.openxmlformats.org/presentationml/2006/main">
   <p:cSld>
     <p:bg>
       <p:bgPr>
@@ -5567,7 +5468,14 @@
         <p:cNvGrpSpPr/>
         <p:nvPr/>
       </p:nvGrpSpPr>
-      <p:grpSpPr/>
+      <p:grpSpPr>
+        <a:xfrm>
+          <a:off x="0" y="0"/>
+          <a:ext cx="0" cy="0"/>
+          <a:chOff x="0" y="0"/>
+          <a:chExt cx="0" cy="0"/>
+        </a:xfrm>
+      </p:grpSpPr>
       <p:sp>
         <p:nvSpPr>
           <p:cNvPr id="2" name="Rectangle 1"/>
@@ -5608,6 +5516,7 @@
           <a:lstStyle/>
           <a:p>
             <a:pPr algn="ctr"/>
+            <a:endParaRPr/>
           </a:p>
         </p:txBody>
       </p:sp>
@@ -5651,6 +5560,7 @@
           <a:lstStyle/>
           <a:p>
             <a:pPr algn="ctr"/>
+            <a:endParaRPr/>
           </a:p>
         </p:txBody>
       </p:sp>
@@ -5765,6 +5675,7 @@
           <a:lstStyle/>
           <a:p>
             <a:pPr algn="ctr"/>
+            <a:endParaRPr/>
           </a:p>
         </p:txBody>
       </p:sp>
@@ -5808,6 +5719,7 @@
           <a:lstStyle/>
           <a:p>
             <a:pPr algn="ctr"/>
+            <a:endParaRPr/>
           </a:p>
         </p:txBody>
       </p:sp>
@@ -5886,6 +5798,7 @@
           <a:lstStyle/>
           <a:p>
             <a:pPr algn="ctr"/>
+            <a:endParaRPr/>
           </a:p>
         </p:txBody>
       </p:sp>
@@ -5965,6 +5878,7 @@
           <a:lstStyle/>
           <a:p>
             <a:pPr algn="ctr"/>
+            <a:endParaRPr/>
           </a:p>
         </p:txBody>
       </p:sp>
@@ -6008,6 +5922,7 @@
           <a:lstStyle/>
           <a:p>
             <a:pPr algn="ctr"/>
+            <a:endParaRPr/>
           </a:p>
         </p:txBody>
       </p:sp>
@@ -6086,6 +6001,7 @@
           <a:lstStyle/>
           <a:p>
             <a:pPr algn="ctr"/>
+            <a:endParaRPr/>
           </a:p>
         </p:txBody>
       </p:sp>
@@ -6165,6 +6081,7 @@
           <a:lstStyle/>
           <a:p>
             <a:pPr algn="ctr"/>
+            <a:endParaRPr/>
           </a:p>
         </p:txBody>
       </p:sp>
@@ -6208,6 +6125,7 @@
           <a:lstStyle/>
           <a:p>
             <a:pPr algn="ctr"/>
+            <a:endParaRPr/>
           </a:p>
         </p:txBody>
       </p:sp>
@@ -6286,6 +6204,7 @@
           <a:lstStyle/>
           <a:p>
             <a:pPr algn="ctr"/>
+            <a:endParaRPr/>
           </a:p>
         </p:txBody>
       </p:sp>
@@ -6365,6 +6284,7 @@
           <a:lstStyle/>
           <a:p>
             <a:pPr algn="ctr"/>
+            <a:endParaRPr/>
           </a:p>
         </p:txBody>
       </p:sp>
@@ -6408,6 +6328,7 @@
           <a:lstStyle/>
           <a:p>
             <a:pPr algn="ctr"/>
+            <a:endParaRPr/>
           </a:p>
         </p:txBody>
       </p:sp>
@@ -6486,6 +6407,7 @@
           <a:lstStyle/>
           <a:p>
             <a:pPr algn="ctr"/>
+            <a:endParaRPr/>
           </a:p>
         </p:txBody>
       </p:sp>
@@ -6565,6 +6487,7 @@
           <a:lstStyle/>
           <a:p>
             <a:pPr algn="ctr"/>
+            <a:endParaRPr/>
           </a:p>
         </p:txBody>
       </p:sp>
@@ -6608,6 +6531,7 @@
           <a:lstStyle/>
           <a:p>
             <a:pPr algn="ctr"/>
+            <a:endParaRPr/>
           </a:p>
         </p:txBody>
       </p:sp>
@@ -6686,6 +6610,7 @@
           <a:lstStyle/>
           <a:p>
             <a:pPr algn="ctr"/>
+            <a:endParaRPr/>
           </a:p>
         </p:txBody>
       </p:sp>
@@ -6765,6 +6690,7 @@
           <a:lstStyle/>
           <a:p>
             <a:pPr algn="ctr"/>
+            <a:endParaRPr/>
           </a:p>
         </p:txBody>
       </p:sp>
@@ -6808,6 +6734,7 @@
           <a:lstStyle/>
           <a:p>
             <a:pPr algn="ctr"/>
+            <a:endParaRPr/>
           </a:p>
         </p:txBody>
       </p:sp>
@@ -6886,6 +6813,7 @@
           <a:lstStyle/>
           <a:p>
             <a:pPr algn="ctr"/>
+            <a:endParaRPr/>
           </a:p>
         </p:txBody>
       </p:sp>
@@ -6969,7 +6897,7 @@
 </file>
 
 <file path=ppt/slides/slide11.xml><?xml version="1.0" encoding="utf-8"?>
-<p:sld xmlns:a="http://schemas.openxmlformats.org/drawingml/2006/main" xmlns:p="http://schemas.openxmlformats.org/presentationml/2006/main" xmlns:r="http://schemas.openxmlformats.org/officeDocument/2006/relationships">
+<p:sld xmlns:a="http://schemas.openxmlformats.org/drawingml/2006/main" xmlns:r="http://schemas.openxmlformats.org/officeDocument/2006/relationships" xmlns:p="http://schemas.openxmlformats.org/presentationml/2006/main">
   <p:cSld>
     <p:bg>
       <p:bgPr>
@@ -6985,7 +6913,14 @@
         <p:cNvGrpSpPr/>
         <p:nvPr/>
       </p:nvGrpSpPr>
-      <p:grpSpPr/>
+      <p:grpSpPr>
+        <a:xfrm>
+          <a:off x="0" y="0"/>
+          <a:ext cx="0" cy="0"/>
+          <a:chOff x="0" y="0"/>
+          <a:chExt cx="0" cy="0"/>
+        </a:xfrm>
+      </p:grpSpPr>
       <p:sp>
         <p:nvSpPr>
           <p:cNvPr id="2" name="Rectangle 1"/>
@@ -7026,6 +6961,7 @@
           <a:lstStyle/>
           <a:p>
             <a:pPr algn="ctr"/>
+            <a:endParaRPr/>
           </a:p>
         </p:txBody>
       </p:sp>
@@ -7069,6 +7005,7 @@
           <a:lstStyle/>
           <a:p>
             <a:pPr algn="ctr"/>
+            <a:endParaRPr/>
           </a:p>
         </p:txBody>
       </p:sp>
@@ -7182,6 +7119,7 @@
           <a:lstStyle/>
           <a:p>
             <a:pPr algn="ctr"/>
+            <a:endParaRPr/>
           </a:p>
         </p:txBody>
       </p:sp>
@@ -7225,6 +7163,7 @@
           <a:lstStyle/>
           <a:p>
             <a:pPr algn="ctr"/>
+            <a:endParaRPr/>
           </a:p>
         </p:txBody>
       </p:sp>
@@ -7339,6 +7278,7 @@
           <a:lstStyle/>
           <a:p>
             <a:pPr algn="ctr"/>
+            <a:endParaRPr/>
           </a:p>
         </p:txBody>
       </p:sp>
@@ -7417,6 +7357,7 @@
           <a:lstStyle/>
           <a:p>
             <a:pPr algn="ctr"/>
+            <a:endParaRPr/>
           </a:p>
         </p:txBody>
       </p:sp>
@@ -7531,6 +7472,7 @@
           <a:lstStyle/>
           <a:p>
             <a:pPr algn="ctr"/>
+            <a:endParaRPr/>
           </a:p>
         </p:txBody>
       </p:sp>
@@ -7645,6 +7587,7 @@
           <a:lstStyle/>
           <a:p>
             <a:pPr algn="ctr"/>
+            <a:endParaRPr/>
           </a:p>
         </p:txBody>
       </p:sp>
@@ -7759,6 +7702,7 @@
           <a:lstStyle/>
           <a:p>
             <a:pPr algn="ctr"/>
+            <a:endParaRPr/>
           </a:p>
         </p:txBody>
       </p:sp>
@@ -7873,6 +7817,7 @@
           <a:lstStyle/>
           <a:p>
             <a:pPr algn="ctr"/>
+            <a:endParaRPr/>
           </a:p>
         </p:txBody>
       </p:sp>
@@ -7987,6 +7932,7 @@
           <a:lstStyle/>
           <a:p>
             <a:pPr algn="ctr"/>
+            <a:endParaRPr/>
           </a:p>
         </p:txBody>
       </p:sp>
@@ -8101,6 +8047,7 @@
           <a:lstStyle/>
           <a:p>
             <a:pPr algn="ctr"/>
+            <a:endParaRPr/>
           </a:p>
         </p:txBody>
       </p:sp>
@@ -8219,7 +8166,7 @@
 </file>
 
 <file path=ppt/slides/slide12.xml><?xml version="1.0" encoding="utf-8"?>
-<p:sld xmlns:a="http://schemas.openxmlformats.org/drawingml/2006/main" xmlns:p="http://schemas.openxmlformats.org/presentationml/2006/main" xmlns:r="http://schemas.openxmlformats.org/officeDocument/2006/relationships">
+<p:sld xmlns:a="http://schemas.openxmlformats.org/drawingml/2006/main" xmlns:r="http://schemas.openxmlformats.org/officeDocument/2006/relationships" xmlns:p="http://schemas.openxmlformats.org/presentationml/2006/main">
   <p:cSld>
     <p:bg>
       <p:bgPr>
@@ -8235,7 +8182,14 @@
         <p:cNvGrpSpPr/>
         <p:nvPr/>
       </p:nvGrpSpPr>
-      <p:grpSpPr/>
+      <p:grpSpPr>
+        <a:xfrm>
+          <a:off x="0" y="0"/>
+          <a:ext cx="0" cy="0"/>
+          <a:chOff x="0" y="0"/>
+          <a:chExt cx="0" cy="0"/>
+        </a:xfrm>
+      </p:grpSpPr>
       <p:sp>
         <p:nvSpPr>
           <p:cNvPr id="2" name="Rectangle 1"/>
@@ -8276,6 +8230,7 @@
           <a:lstStyle/>
           <a:p>
             <a:pPr algn="ctr"/>
+            <a:endParaRPr/>
           </a:p>
         </p:txBody>
       </p:sp>
@@ -8319,6 +8274,7 @@
           <a:lstStyle/>
           <a:p>
             <a:pPr algn="ctr"/>
+            <a:endParaRPr/>
           </a:p>
         </p:txBody>
       </p:sp>
@@ -8432,6 +8388,7 @@
           <a:lstStyle/>
           <a:p>
             <a:pPr algn="ctr"/>
+            <a:endParaRPr/>
           </a:p>
         </p:txBody>
       </p:sp>
@@ -8475,6 +8432,7 @@
           <a:lstStyle/>
           <a:p>
             <a:pPr algn="ctr"/>
+            <a:endParaRPr/>
           </a:p>
         </p:txBody>
       </p:sp>
@@ -8588,6 +8546,7 @@
           <a:lstStyle/>
           <a:p>
             <a:pPr algn="ctr"/>
+            <a:endParaRPr/>
           </a:p>
         </p:txBody>
       </p:sp>
@@ -8666,6 +8625,7 @@
           <a:lstStyle/>
           <a:p>
             <a:pPr algn="ctr"/>
+            <a:endParaRPr/>
           </a:p>
         </p:txBody>
       </p:sp>
@@ -8709,6 +8669,7 @@
           <a:lstStyle/>
           <a:p>
             <a:pPr algn="ctr"/>
+            <a:endParaRPr/>
           </a:p>
         </p:txBody>
       </p:sp>
@@ -8822,6 +8783,7 @@
           <a:lstStyle/>
           <a:p>
             <a:pPr algn="ctr"/>
+            <a:endParaRPr/>
           </a:p>
         </p:txBody>
       </p:sp>
@@ -8900,6 +8862,7 @@
           <a:lstStyle/>
           <a:p>
             <a:pPr algn="ctr"/>
+            <a:endParaRPr/>
           </a:p>
         </p:txBody>
       </p:sp>
@@ -8943,6 +8906,7 @@
           <a:lstStyle/>
           <a:p>
             <a:pPr algn="ctr"/>
+            <a:endParaRPr/>
           </a:p>
         </p:txBody>
       </p:sp>
@@ -9056,6 +9020,7 @@
           <a:lstStyle/>
           <a:p>
             <a:pPr algn="ctr"/>
+            <a:endParaRPr/>
           </a:p>
         </p:txBody>
       </p:sp>
@@ -9134,6 +9099,7 @@
           <a:lstStyle/>
           <a:p>
             <a:pPr algn="ctr"/>
+            <a:endParaRPr/>
           </a:p>
         </p:txBody>
       </p:sp>
@@ -9177,6 +9143,7 @@
           <a:lstStyle/>
           <a:p>
             <a:pPr algn="ctr"/>
+            <a:endParaRPr/>
           </a:p>
         </p:txBody>
       </p:sp>
@@ -9290,6 +9257,7 @@
           <a:lstStyle/>
           <a:p>
             <a:pPr algn="ctr"/>
+            <a:endParaRPr/>
           </a:p>
         </p:txBody>
       </p:sp>
@@ -9368,6 +9336,7 @@
           <a:lstStyle/>
           <a:p>
             <a:pPr algn="ctr"/>
+            <a:endParaRPr/>
           </a:p>
         </p:txBody>
       </p:sp>
@@ -9411,6 +9380,7 @@
           <a:lstStyle/>
           <a:p>
             <a:pPr algn="ctr"/>
+            <a:endParaRPr/>
           </a:p>
         </p:txBody>
       </p:sp>
@@ -9524,6 +9494,7 @@
           <a:lstStyle/>
           <a:p>
             <a:pPr algn="ctr"/>
+            <a:endParaRPr/>
           </a:p>
         </p:txBody>
       </p:sp>
@@ -9602,6 +9573,7 @@
           <a:lstStyle/>
           <a:p>
             <a:pPr algn="ctr"/>
+            <a:endParaRPr/>
           </a:p>
         </p:txBody>
       </p:sp>
@@ -9645,6 +9617,7 @@
           <a:lstStyle/>
           <a:p>
             <a:pPr algn="ctr"/>
+            <a:endParaRPr/>
           </a:p>
         </p:txBody>
       </p:sp>
@@ -9758,6 +9731,7 @@
           <a:lstStyle/>
           <a:p>
             <a:pPr algn="ctr"/>
+            <a:endParaRPr/>
           </a:p>
         </p:txBody>
       </p:sp>
@@ -9805,7 +9779,7 @@
 </file>
 
 <file path=ppt/slides/slide13.xml><?xml version="1.0" encoding="utf-8"?>
-<p:sld xmlns:a="http://schemas.openxmlformats.org/drawingml/2006/main" xmlns:p="http://schemas.openxmlformats.org/presentationml/2006/main" xmlns:r="http://schemas.openxmlformats.org/officeDocument/2006/relationships">
+<p:sld xmlns:a="http://schemas.openxmlformats.org/drawingml/2006/main" xmlns:r="http://schemas.openxmlformats.org/officeDocument/2006/relationships" xmlns:p="http://schemas.openxmlformats.org/presentationml/2006/main">
   <p:cSld>
     <p:bg>
       <p:bgPr>
@@ -9821,7 +9795,14 @@
         <p:cNvGrpSpPr/>
         <p:nvPr/>
       </p:nvGrpSpPr>
-      <p:grpSpPr/>
+      <p:grpSpPr>
+        <a:xfrm>
+          <a:off x="0" y="0"/>
+          <a:ext cx="0" cy="0"/>
+          <a:chOff x="0" y="0"/>
+          <a:chExt cx="0" cy="0"/>
+        </a:xfrm>
+      </p:grpSpPr>
       <p:sp>
         <p:nvSpPr>
           <p:cNvPr id="2" name="Rectangle 1"/>
@@ -9862,6 +9843,7 @@
           <a:lstStyle/>
           <a:p>
             <a:pPr algn="ctr"/>
+            <a:endParaRPr/>
           </a:p>
         </p:txBody>
       </p:sp>
@@ -9905,6 +9887,7 @@
           <a:lstStyle/>
           <a:p>
             <a:pPr algn="ctr"/>
+            <a:endParaRPr/>
           </a:p>
         </p:txBody>
       </p:sp>
@@ -10062,6 +10045,7 @@
           <a:lstStyle/>
           <a:p>
             <a:pPr algn="ctr"/>
+            <a:endParaRPr/>
           </a:p>
         </p:txBody>
       </p:sp>
@@ -10105,6 +10089,7 @@
           <a:lstStyle/>
           <a:p>
             <a:pPr algn="ctr"/>
+            <a:endParaRPr/>
           </a:p>
         </p:txBody>
       </p:sp>
@@ -10183,6 +10168,7 @@
           <a:lstStyle/>
           <a:p>
             <a:pPr algn="ctr"/>
+            <a:endParaRPr/>
           </a:p>
         </p:txBody>
       </p:sp>
@@ -10262,6 +10248,7 @@
           <a:lstStyle/>
           <a:p>
             <a:pPr algn="ctr"/>
+            <a:endParaRPr/>
           </a:p>
         </p:txBody>
       </p:sp>
@@ -10340,6 +10327,7 @@
           <a:lstStyle/>
           <a:p>
             <a:pPr algn="ctr"/>
+            <a:endParaRPr/>
           </a:p>
         </p:txBody>
       </p:sp>
@@ -10419,6 +10407,7 @@
           <a:lstStyle/>
           <a:p>
             <a:pPr algn="ctr"/>
+            <a:endParaRPr/>
           </a:p>
         </p:txBody>
       </p:sp>
@@ -10497,6 +10486,7 @@
           <a:lstStyle/>
           <a:p>
             <a:pPr algn="ctr"/>
+            <a:endParaRPr/>
           </a:p>
         </p:txBody>
       </p:sp>
@@ -10580,7 +10570,7 @@
 </file>
 
 <file path=ppt/slides/slide2.xml><?xml version="1.0" encoding="utf-8"?>
-<p:sld xmlns:a="http://schemas.openxmlformats.org/drawingml/2006/main" xmlns:p="http://schemas.openxmlformats.org/presentationml/2006/main" xmlns:r="http://schemas.openxmlformats.org/officeDocument/2006/relationships">
+<p:sld xmlns:a="http://schemas.openxmlformats.org/drawingml/2006/main" xmlns:r="http://schemas.openxmlformats.org/officeDocument/2006/relationships" xmlns:p="http://schemas.openxmlformats.org/presentationml/2006/main">
   <p:cSld>
     <p:bg>
       <p:bgPr>
@@ -10596,7 +10586,14 @@
         <p:cNvGrpSpPr/>
         <p:nvPr/>
       </p:nvGrpSpPr>
-      <p:grpSpPr/>
+      <p:grpSpPr>
+        <a:xfrm>
+          <a:off x="0" y="0"/>
+          <a:ext cx="0" cy="0"/>
+          <a:chOff x="0" y="0"/>
+          <a:chExt cx="0" cy="0"/>
+        </a:xfrm>
+      </p:grpSpPr>
       <p:sp>
         <p:nvSpPr>
           <p:cNvPr id="2" name="Rectangle 1"/>
@@ -10637,6 +10634,7 @@
           <a:lstStyle/>
           <a:p>
             <a:pPr algn="ctr"/>
+            <a:endParaRPr/>
           </a:p>
         </p:txBody>
       </p:sp>
@@ -10680,6 +10678,7 @@
           <a:lstStyle/>
           <a:p>
             <a:pPr algn="ctr"/>
+            <a:endParaRPr/>
           </a:p>
         </p:txBody>
       </p:sp>
@@ -10909,6 +10908,7 @@
           <a:lstStyle/>
           <a:p>
             <a:pPr algn="ctr"/>
+            <a:endParaRPr/>
           </a:p>
         </p:txBody>
       </p:sp>
@@ -10952,6 +10952,7 @@
           <a:lstStyle/>
           <a:p>
             <a:pPr algn="ctr"/>
+            <a:endParaRPr/>
           </a:p>
         </p:txBody>
       </p:sp>
@@ -11030,6 +11031,7 @@
           <a:lstStyle/>
           <a:p>
             <a:pPr algn="ctr"/>
+            <a:endParaRPr/>
           </a:p>
         </p:txBody>
       </p:sp>
@@ -11109,6 +11111,7 @@
           <a:lstStyle/>
           <a:p>
             <a:pPr algn="ctr"/>
+            <a:endParaRPr/>
           </a:p>
         </p:txBody>
       </p:sp>
@@ -11152,6 +11155,7 @@
           <a:lstStyle/>
           <a:p>
             <a:pPr algn="ctr"/>
+            <a:endParaRPr/>
           </a:p>
         </p:txBody>
       </p:sp>
@@ -11230,6 +11234,7 @@
           <a:lstStyle/>
           <a:p>
             <a:pPr algn="ctr"/>
+            <a:endParaRPr/>
           </a:p>
         </p:txBody>
       </p:sp>
@@ -11309,6 +11314,7 @@
           <a:lstStyle/>
           <a:p>
             <a:pPr algn="ctr"/>
+            <a:endParaRPr/>
           </a:p>
         </p:txBody>
       </p:sp>
@@ -11352,6 +11358,7 @@
           <a:lstStyle/>
           <a:p>
             <a:pPr algn="ctr"/>
+            <a:endParaRPr/>
           </a:p>
         </p:txBody>
       </p:sp>
@@ -11430,6 +11437,7 @@
           <a:lstStyle/>
           <a:p>
             <a:pPr algn="ctr"/>
+            <a:endParaRPr/>
           </a:p>
         </p:txBody>
       </p:sp>
@@ -11509,6 +11517,7 @@
           <a:lstStyle/>
           <a:p>
             <a:pPr algn="ctr"/>
+            <a:endParaRPr/>
           </a:p>
         </p:txBody>
       </p:sp>
@@ -11552,6 +11561,7 @@
           <a:lstStyle/>
           <a:p>
             <a:pPr algn="ctr"/>
+            <a:endParaRPr/>
           </a:p>
         </p:txBody>
       </p:sp>
@@ -11630,6 +11640,7 @@
           <a:lstStyle/>
           <a:p>
             <a:pPr algn="ctr"/>
+            <a:endParaRPr/>
           </a:p>
         </p:txBody>
       </p:sp>
@@ -11709,6 +11720,7 @@
           <a:lstStyle/>
           <a:p>
             <a:pPr algn="ctr"/>
+            <a:endParaRPr/>
           </a:p>
         </p:txBody>
       </p:sp>
@@ -11752,6 +11764,7 @@
           <a:lstStyle/>
           <a:p>
             <a:pPr algn="ctr"/>
+            <a:endParaRPr/>
           </a:p>
         </p:txBody>
       </p:sp>
@@ -11830,6 +11843,7 @@
           <a:lstStyle/>
           <a:p>
             <a:pPr algn="ctr"/>
+            <a:endParaRPr/>
           </a:p>
         </p:txBody>
       </p:sp>
@@ -11909,6 +11923,7 @@
           <a:lstStyle/>
           <a:p>
             <a:pPr algn="ctr"/>
+            <a:endParaRPr/>
           </a:p>
         </p:txBody>
       </p:sp>
@@ -11952,6 +11967,7 @@
           <a:lstStyle/>
           <a:p>
             <a:pPr algn="ctr"/>
+            <a:endParaRPr/>
           </a:p>
         </p:txBody>
       </p:sp>
@@ -12030,6 +12046,7 @@
           <a:lstStyle/>
           <a:p>
             <a:pPr algn="ctr"/>
+            <a:endParaRPr/>
           </a:p>
         </p:txBody>
       </p:sp>
@@ -12078,7 +12095,7 @@
 </file>
 
 <file path=ppt/slides/slide3.xml><?xml version="1.0" encoding="utf-8"?>
-<p:sld xmlns:a="http://schemas.openxmlformats.org/drawingml/2006/main" xmlns:p="http://schemas.openxmlformats.org/presentationml/2006/main" xmlns:r="http://schemas.openxmlformats.org/officeDocument/2006/relationships">
+<p:sld xmlns:a="http://schemas.openxmlformats.org/drawingml/2006/main" xmlns:r="http://schemas.openxmlformats.org/officeDocument/2006/relationships" xmlns:p="http://schemas.openxmlformats.org/presentationml/2006/main">
   <p:cSld>
     <p:bg>
       <p:bgPr>
@@ -12094,7 +12111,14 @@
         <p:cNvGrpSpPr/>
         <p:nvPr/>
       </p:nvGrpSpPr>
-      <p:grpSpPr/>
+      <p:grpSpPr>
+        <a:xfrm>
+          <a:off x="0" y="0"/>
+          <a:ext cx="0" cy="0"/>
+          <a:chOff x="0" y="0"/>
+          <a:chExt cx="0" cy="0"/>
+        </a:xfrm>
+      </p:grpSpPr>
       <p:sp>
         <p:nvSpPr>
           <p:cNvPr id="2" name="Rectangle 1"/>
@@ -12135,6 +12159,7 @@
           <a:lstStyle/>
           <a:p>
             <a:pPr algn="ctr"/>
+            <a:endParaRPr/>
           </a:p>
         </p:txBody>
       </p:sp>
@@ -12249,6 +12274,7 @@
           <a:lstStyle/>
           <a:p>
             <a:pPr algn="ctr"/>
+            <a:endParaRPr/>
           </a:p>
         </p:txBody>
       </p:sp>
@@ -12292,6 +12318,7 @@
           <a:lstStyle/>
           <a:p>
             <a:pPr algn="ctr"/>
+            <a:endParaRPr/>
           </a:p>
         </p:txBody>
       </p:sp>
@@ -12370,6 +12397,7 @@
           <a:lstStyle/>
           <a:p>
             <a:pPr algn="ctr"/>
+            <a:endParaRPr/>
           </a:p>
         </p:txBody>
       </p:sp>
@@ -12450,6 +12478,7 @@
           <a:lstStyle/>
           <a:p>
             <a:pPr algn="ctr"/>
+            <a:endParaRPr/>
           </a:p>
         </p:txBody>
       </p:sp>
@@ -12528,6 +12557,7 @@
           <a:lstStyle/>
           <a:p>
             <a:pPr algn="ctr"/>
+            <a:endParaRPr/>
           </a:p>
         </p:txBody>
       </p:sp>
@@ -12608,6 +12638,7 @@
           <a:lstStyle/>
           <a:p>
             <a:pPr algn="ctr"/>
+            <a:endParaRPr/>
           </a:p>
         </p:txBody>
       </p:sp>
@@ -12686,6 +12717,7 @@
           <a:lstStyle/>
           <a:p>
             <a:pPr algn="ctr"/>
+            <a:endParaRPr/>
           </a:p>
         </p:txBody>
       </p:sp>
@@ -12770,7 +12802,7 @@
 </file>
 
 <file path=ppt/slides/slide4.xml><?xml version="1.0" encoding="utf-8"?>
-<p:sld xmlns:a="http://schemas.openxmlformats.org/drawingml/2006/main" xmlns:p="http://schemas.openxmlformats.org/presentationml/2006/main" xmlns:r="http://schemas.openxmlformats.org/officeDocument/2006/relationships">
+<p:sld xmlns:a="http://schemas.openxmlformats.org/drawingml/2006/main" xmlns:r="http://schemas.openxmlformats.org/officeDocument/2006/relationships" xmlns:p="http://schemas.openxmlformats.org/presentationml/2006/main">
   <p:cSld>
     <p:bg>
       <p:bgPr>
@@ -12786,7 +12818,14 @@
         <p:cNvGrpSpPr/>
         <p:nvPr/>
       </p:nvGrpSpPr>
-      <p:grpSpPr/>
+      <p:grpSpPr>
+        <a:xfrm>
+          <a:off x="0" y="0"/>
+          <a:ext cx="0" cy="0"/>
+          <a:chOff x="0" y="0"/>
+          <a:chExt cx="0" cy="0"/>
+        </a:xfrm>
+      </p:grpSpPr>
       <p:sp>
         <p:nvSpPr>
           <p:cNvPr id="2" name="Rectangle 1"/>
@@ -12827,6 +12866,7 @@
           <a:lstStyle/>
           <a:p>
             <a:pPr algn="ctr"/>
+            <a:endParaRPr/>
           </a:p>
         </p:txBody>
       </p:sp>
@@ -12870,6 +12910,7 @@
           <a:lstStyle/>
           <a:p>
             <a:pPr algn="ctr"/>
+            <a:endParaRPr/>
           </a:p>
         </p:txBody>
       </p:sp>
@@ -13018,6 +13059,7 @@
           <a:lstStyle/>
           <a:p>
             <a:pPr algn="ctr"/>
+            <a:endParaRPr/>
           </a:p>
         </p:txBody>
       </p:sp>
@@ -13131,6 +13173,7 @@
           <a:lstStyle/>
           <a:p>
             <a:pPr algn="ctr"/>
+            <a:endParaRPr/>
           </a:p>
         </p:txBody>
       </p:sp>
@@ -13210,6 +13253,7 @@
           <a:lstStyle/>
           <a:p>
             <a:pPr algn="ctr"/>
+            <a:endParaRPr/>
           </a:p>
         </p:txBody>
       </p:sp>
@@ -13323,6 +13367,7 @@
           <a:lstStyle/>
           <a:p>
             <a:pPr algn="ctr"/>
+            <a:endParaRPr/>
           </a:p>
         </p:txBody>
       </p:sp>
@@ -13402,6 +13447,7 @@
           <a:lstStyle/>
           <a:p>
             <a:pPr algn="ctr"/>
+            <a:endParaRPr/>
           </a:p>
         </p:txBody>
       </p:sp>
@@ -13515,6 +13561,7 @@
           <a:lstStyle/>
           <a:p>
             <a:pPr algn="ctr"/>
+            <a:endParaRPr/>
           </a:p>
         </p:txBody>
       </p:sp>
@@ -13594,6 +13641,7 @@
           <a:lstStyle/>
           <a:p>
             <a:pPr algn="ctr"/>
+            <a:endParaRPr/>
           </a:p>
         </p:txBody>
       </p:sp>
@@ -13707,6 +13755,7 @@
           <a:lstStyle/>
           <a:p>
             <a:pPr algn="ctr"/>
+            <a:endParaRPr/>
           </a:p>
         </p:txBody>
       </p:sp>
@@ -13786,6 +13835,7 @@
           <a:lstStyle/>
           <a:p>
             <a:pPr algn="ctr"/>
+            <a:endParaRPr/>
           </a:p>
         </p:txBody>
       </p:sp>
@@ -13899,6 +13949,7 @@
           <a:lstStyle/>
           <a:p>
             <a:pPr algn="ctr"/>
+            <a:endParaRPr/>
           </a:p>
         </p:txBody>
       </p:sp>
@@ -13947,7 +13998,7 @@
 </file>
 
 <file path=ppt/slides/slide5.xml><?xml version="1.0" encoding="utf-8"?>
-<p:sld xmlns:a="http://schemas.openxmlformats.org/drawingml/2006/main" xmlns:p="http://schemas.openxmlformats.org/presentationml/2006/main" xmlns:r="http://schemas.openxmlformats.org/officeDocument/2006/relationships">
+<p:sld xmlns:a="http://schemas.openxmlformats.org/drawingml/2006/main" xmlns:r="http://schemas.openxmlformats.org/officeDocument/2006/relationships" xmlns:p="http://schemas.openxmlformats.org/presentationml/2006/main">
   <p:cSld>
     <p:bg>
       <p:bgPr>
@@ -13963,7 +14014,14 @@
         <p:cNvGrpSpPr/>
         <p:nvPr/>
       </p:nvGrpSpPr>
-      <p:grpSpPr/>
+      <p:grpSpPr>
+        <a:xfrm>
+          <a:off x="0" y="0"/>
+          <a:ext cx="0" cy="0"/>
+          <a:chOff x="0" y="0"/>
+          <a:chExt cx="0" cy="0"/>
+        </a:xfrm>
+      </p:grpSpPr>
       <p:sp>
         <p:nvSpPr>
           <p:cNvPr id="2" name="Rectangle 1"/>
@@ -14004,6 +14062,7 @@
           <a:lstStyle/>
           <a:p>
             <a:pPr algn="ctr"/>
+            <a:endParaRPr/>
           </a:p>
         </p:txBody>
       </p:sp>
@@ -14047,6 +14106,7 @@
           <a:lstStyle/>
           <a:p>
             <a:pPr algn="ctr"/>
+            <a:endParaRPr/>
           </a:p>
         </p:txBody>
       </p:sp>
@@ -14195,6 +14255,7 @@
           <a:lstStyle/>
           <a:p>
             <a:pPr algn="ctr"/>
+            <a:endParaRPr/>
           </a:p>
         </p:txBody>
       </p:sp>
@@ -14238,6 +14299,7 @@
           <a:lstStyle/>
           <a:p>
             <a:pPr algn="ctr"/>
+            <a:endParaRPr/>
           </a:p>
         </p:txBody>
       </p:sp>
@@ -14351,6 +14413,7 @@
           <a:lstStyle/>
           <a:p>
             <a:pPr algn="ctr"/>
+            <a:endParaRPr/>
           </a:p>
         </p:txBody>
       </p:sp>
@@ -14468,6 +14531,7 @@
           <a:lstStyle/>
           <a:p>
             <a:pPr algn="ctr"/>
+            <a:endParaRPr/>
           </a:p>
         </p:txBody>
       </p:sp>
@@ -14511,6 +14575,7 @@
           <a:lstStyle/>
           <a:p>
             <a:pPr algn="ctr"/>
+            <a:endParaRPr/>
           </a:p>
         </p:txBody>
       </p:sp>
@@ -14624,6 +14689,7 @@
           <a:lstStyle/>
           <a:p>
             <a:pPr algn="ctr"/>
+            <a:endParaRPr/>
           </a:p>
         </p:txBody>
       </p:sp>
@@ -14741,6 +14807,7 @@
           <a:lstStyle/>
           <a:p>
             <a:pPr algn="ctr"/>
+            <a:endParaRPr/>
           </a:p>
         </p:txBody>
       </p:sp>
@@ -14784,6 +14851,7 @@
           <a:lstStyle/>
           <a:p>
             <a:pPr algn="ctr"/>
+            <a:endParaRPr/>
           </a:p>
         </p:txBody>
       </p:sp>
@@ -14897,6 +14965,7 @@
           <a:lstStyle/>
           <a:p>
             <a:pPr algn="ctr"/>
+            <a:endParaRPr/>
           </a:p>
         </p:txBody>
       </p:sp>
@@ -15014,6 +15083,7 @@
           <a:lstStyle/>
           <a:p>
             <a:pPr algn="ctr"/>
+            <a:endParaRPr/>
           </a:p>
         </p:txBody>
       </p:sp>
@@ -15057,6 +15127,7 @@
           <a:lstStyle/>
           <a:p>
             <a:pPr algn="ctr"/>
+            <a:endParaRPr/>
           </a:p>
         </p:txBody>
       </p:sp>
@@ -15170,6 +15241,7 @@
           <a:lstStyle/>
           <a:p>
             <a:pPr algn="ctr"/>
+            <a:endParaRPr/>
           </a:p>
         </p:txBody>
       </p:sp>
@@ -15287,6 +15359,7 @@
           <a:lstStyle/>
           <a:p>
             <a:pPr algn="ctr"/>
+            <a:endParaRPr/>
           </a:p>
         </p:txBody>
       </p:sp>
@@ -15330,6 +15403,7 @@
           <a:lstStyle/>
           <a:p>
             <a:pPr algn="ctr"/>
+            <a:endParaRPr/>
           </a:p>
         </p:txBody>
       </p:sp>
@@ -15443,6 +15517,7 @@
           <a:lstStyle/>
           <a:p>
             <a:pPr algn="ctr"/>
+            <a:endParaRPr/>
           </a:p>
         </p:txBody>
       </p:sp>
@@ -15558,6 +15633,7 @@
           <a:lstStyle/>
           <a:p>
             <a:pPr algn="ctr"/>
+            <a:endParaRPr/>
           </a:p>
         </p:txBody>
       </p:sp>
@@ -15601,6 +15677,7 @@
           <a:lstStyle/>
           <a:p>
             <a:pPr algn="ctr"/>
+            <a:endParaRPr/>
           </a:p>
         </p:txBody>
       </p:sp>
@@ -15714,6 +15791,7 @@
           <a:lstStyle/>
           <a:p>
             <a:pPr algn="ctr"/>
+            <a:endParaRPr/>
           </a:p>
         </p:txBody>
       </p:sp>
@@ -15763,7 +15841,7 @@
 </file>
 
 <file path=ppt/slides/slide6.xml><?xml version="1.0" encoding="utf-8"?>
-<p:sld xmlns:a="http://schemas.openxmlformats.org/drawingml/2006/main" xmlns:p="http://schemas.openxmlformats.org/presentationml/2006/main" xmlns:r="http://schemas.openxmlformats.org/officeDocument/2006/relationships">
+<p:sld xmlns:a="http://schemas.openxmlformats.org/drawingml/2006/main" xmlns:r="http://schemas.openxmlformats.org/officeDocument/2006/relationships" xmlns:p="http://schemas.openxmlformats.org/presentationml/2006/main">
   <p:cSld>
     <p:bg>
       <p:bgPr>
@@ -15779,7 +15857,14 @@
         <p:cNvGrpSpPr/>
         <p:nvPr/>
       </p:nvGrpSpPr>
-      <p:grpSpPr/>
+      <p:grpSpPr>
+        <a:xfrm>
+          <a:off x="0" y="0"/>
+          <a:ext cx="0" cy="0"/>
+          <a:chOff x="0" y="0"/>
+          <a:chExt cx="0" cy="0"/>
+        </a:xfrm>
+      </p:grpSpPr>
       <p:sp>
         <p:nvSpPr>
           <p:cNvPr id="2" name="Rectangle 1"/>
@@ -15820,6 +15905,7 @@
           <a:lstStyle/>
           <a:p>
             <a:pPr algn="ctr"/>
+            <a:endParaRPr/>
           </a:p>
         </p:txBody>
       </p:sp>
@@ -15863,6 +15949,7 @@
           <a:lstStyle/>
           <a:p>
             <a:pPr algn="ctr"/>
+            <a:endParaRPr/>
           </a:p>
         </p:txBody>
       </p:sp>
@@ -16013,6 +16100,7 @@
           <a:lstStyle/>
           <a:p>
             <a:pPr algn="ctr"/>
+            <a:endParaRPr/>
           </a:p>
         </p:txBody>
       </p:sp>
@@ -16056,6 +16144,7 @@
           <a:lstStyle/>
           <a:p>
             <a:pPr algn="ctr"/>
+            <a:endParaRPr/>
           </a:p>
         </p:txBody>
       </p:sp>
@@ -16169,6 +16258,7 @@
           <a:lstStyle/>
           <a:p>
             <a:pPr algn="ctr"/>
+            <a:endParaRPr/>
           </a:p>
         </p:txBody>
       </p:sp>
@@ -16283,6 +16373,7 @@
           <a:lstStyle/>
           <a:p>
             <a:pPr algn="ctr"/>
+            <a:endParaRPr/>
           </a:p>
         </p:txBody>
       </p:sp>
@@ -16326,6 +16417,7 @@
           <a:lstStyle/>
           <a:p>
             <a:pPr algn="ctr"/>
+            <a:endParaRPr/>
           </a:p>
         </p:txBody>
       </p:sp>
@@ -16439,6 +16531,7 @@
           <a:lstStyle/>
           <a:p>
             <a:pPr algn="ctr"/>
+            <a:endParaRPr/>
           </a:p>
         </p:txBody>
       </p:sp>
@@ -16555,6 +16648,7 @@
           <a:lstStyle/>
           <a:p>
             <a:pPr algn="ctr"/>
+            <a:endParaRPr/>
           </a:p>
         </p:txBody>
       </p:sp>
@@ -16598,6 +16692,7 @@
           <a:lstStyle/>
           <a:p>
             <a:pPr algn="ctr"/>
+            <a:endParaRPr/>
           </a:p>
         </p:txBody>
       </p:sp>
@@ -16711,6 +16806,7 @@
           <a:lstStyle/>
           <a:p>
             <a:pPr algn="ctr"/>
+            <a:endParaRPr/>
           </a:p>
         </p:txBody>
       </p:sp>
@@ -16825,6 +16921,7 @@
           <a:lstStyle/>
           <a:p>
             <a:pPr algn="ctr"/>
+            <a:endParaRPr/>
           </a:p>
         </p:txBody>
       </p:sp>
@@ -16868,6 +16965,7 @@
           <a:lstStyle/>
           <a:p>
             <a:pPr algn="ctr"/>
+            <a:endParaRPr/>
           </a:p>
         </p:txBody>
       </p:sp>
@@ -16981,6 +17079,7 @@
           <a:lstStyle/>
           <a:p>
             <a:pPr algn="ctr"/>
+            <a:endParaRPr/>
           </a:p>
         </p:txBody>
       </p:sp>
@@ -17097,6 +17196,7 @@
           <a:lstStyle/>
           <a:p>
             <a:pPr algn="ctr"/>
+            <a:endParaRPr/>
           </a:p>
         </p:txBody>
       </p:sp>
@@ -17140,6 +17240,7 @@
           <a:lstStyle/>
           <a:p>
             <a:pPr algn="ctr"/>
+            <a:endParaRPr/>
           </a:p>
         </p:txBody>
       </p:sp>
@@ -17253,6 +17354,7 @@
           <a:lstStyle/>
           <a:p>
             <a:pPr algn="ctr"/>
+            <a:endParaRPr/>
           </a:p>
         </p:txBody>
       </p:sp>
@@ -17369,6 +17471,7 @@
           <a:lstStyle/>
           <a:p>
             <a:pPr algn="ctr"/>
+            <a:endParaRPr/>
           </a:p>
         </p:txBody>
       </p:sp>
@@ -17412,6 +17515,7 @@
           <a:lstStyle/>
           <a:p>
             <a:pPr algn="ctr"/>
+            <a:endParaRPr/>
           </a:p>
         </p:txBody>
       </p:sp>
@@ -17525,6 +17629,7 @@
           <a:lstStyle/>
           <a:p>
             <a:pPr algn="ctr"/>
+            <a:endParaRPr/>
           </a:p>
         </p:txBody>
       </p:sp>
@@ -17639,6 +17744,7 @@
           <a:lstStyle/>
           <a:p>
             <a:pPr algn="ctr"/>
+            <a:endParaRPr/>
           </a:p>
         </p:txBody>
       </p:sp>
@@ -17682,6 +17788,7 @@
           <a:lstStyle/>
           <a:p>
             <a:pPr algn="ctr"/>
+            <a:endParaRPr/>
           </a:p>
         </p:txBody>
       </p:sp>
@@ -17795,6 +17902,7 @@
           <a:lstStyle/>
           <a:p>
             <a:pPr algn="ctr"/>
+            <a:endParaRPr/>
           </a:p>
         </p:txBody>
       </p:sp>
@@ -17874,6 +17982,7 @@
           <a:lstStyle/>
           <a:p>
             <a:pPr algn="ctr"/>
+            <a:endParaRPr/>
           </a:p>
         </p:txBody>
       </p:sp>
@@ -17921,7 +18030,7 @@
 </file>
 
 <file path=ppt/slides/slide7.xml><?xml version="1.0" encoding="utf-8"?>
-<p:sld xmlns:a="http://schemas.openxmlformats.org/drawingml/2006/main" xmlns:p="http://schemas.openxmlformats.org/presentationml/2006/main" xmlns:r="http://schemas.openxmlformats.org/officeDocument/2006/relationships">
+<p:sld xmlns:a="http://schemas.openxmlformats.org/drawingml/2006/main" xmlns:r="http://schemas.openxmlformats.org/officeDocument/2006/relationships" xmlns:p="http://schemas.openxmlformats.org/presentationml/2006/main">
   <p:cSld>
     <p:bg>
       <p:bgPr>
@@ -17937,7 +18046,14 @@
         <p:cNvGrpSpPr/>
         <p:nvPr/>
       </p:nvGrpSpPr>
-      <p:grpSpPr/>
+      <p:grpSpPr>
+        <a:xfrm>
+          <a:off x="0" y="0"/>
+          <a:ext cx="0" cy="0"/>
+          <a:chOff x="0" y="0"/>
+          <a:chExt cx="0" cy="0"/>
+        </a:xfrm>
+      </p:grpSpPr>
       <p:sp>
         <p:nvSpPr>
           <p:cNvPr id="2" name="Rectangle 1"/>
@@ -17978,6 +18094,7 @@
           <a:lstStyle/>
           <a:p>
             <a:pPr algn="ctr"/>
+            <a:endParaRPr/>
           </a:p>
         </p:txBody>
       </p:sp>
@@ -18021,6 +18138,7 @@
           <a:lstStyle/>
           <a:p>
             <a:pPr algn="ctr"/>
+            <a:endParaRPr/>
           </a:p>
         </p:txBody>
       </p:sp>
@@ -18134,6 +18252,7 @@
           <a:lstStyle/>
           <a:p>
             <a:pPr algn="ctr"/>
+            <a:endParaRPr/>
           </a:p>
         </p:txBody>
       </p:sp>
@@ -18212,6 +18331,7 @@
           <a:lstStyle/>
           <a:p>
             <a:pPr algn="ctr"/>
+            <a:endParaRPr/>
           </a:p>
         </p:txBody>
       </p:sp>
@@ -18290,6 +18410,7 @@
           <a:lstStyle/>
           <a:p>
             <a:pPr algn="ctr"/>
+            <a:endParaRPr/>
           </a:p>
         </p:txBody>
       </p:sp>
@@ -18368,6 +18489,7 @@
           <a:lstStyle/>
           <a:p>
             <a:pPr algn="ctr"/>
+            <a:endParaRPr/>
           </a:p>
         </p:txBody>
       </p:sp>
@@ -18446,6 +18568,7 @@
           <a:lstStyle/>
           <a:p>
             <a:pPr algn="ctr"/>
+            <a:endParaRPr/>
           </a:p>
         </p:txBody>
       </p:sp>
@@ -18524,6 +18647,7 @@
           <a:lstStyle/>
           <a:p>
             <a:pPr algn="ctr"/>
+            <a:endParaRPr/>
           </a:p>
         </p:txBody>
       </p:sp>
@@ -18602,6 +18726,7 @@
           <a:lstStyle/>
           <a:p>
             <a:pPr algn="ctr"/>
+            <a:endParaRPr/>
           </a:p>
         </p:txBody>
       </p:sp>
@@ -18645,6 +18770,7 @@
           <a:lstStyle/>
           <a:p>
             <a:pPr algn="ctr"/>
+            <a:endParaRPr/>
           </a:p>
         </p:txBody>
       </p:sp>
@@ -18723,6 +18849,7 @@
           <a:lstStyle/>
           <a:p>
             <a:pPr algn="ctr"/>
+            <a:endParaRPr/>
           </a:p>
         </p:txBody>
       </p:sp>
@@ -18801,6 +18928,7 @@
           <a:lstStyle/>
           <a:p>
             <a:pPr algn="ctr"/>
+            <a:endParaRPr/>
           </a:p>
         </p:txBody>
       </p:sp>
@@ -18879,6 +19007,7 @@
           <a:lstStyle/>
           <a:p>
             <a:pPr algn="ctr"/>
+            <a:endParaRPr/>
           </a:p>
         </p:txBody>
       </p:sp>
@@ -18922,6 +19051,7 @@
           <a:lstStyle/>
           <a:p>
             <a:pPr algn="ctr"/>
+            <a:endParaRPr/>
           </a:p>
         </p:txBody>
       </p:sp>
@@ -19000,6 +19130,7 @@
           <a:lstStyle/>
           <a:p>
             <a:pPr algn="ctr"/>
+            <a:endParaRPr/>
           </a:p>
         </p:txBody>
       </p:sp>
@@ -19078,6 +19209,7 @@
           <a:lstStyle/>
           <a:p>
             <a:pPr algn="ctr"/>
+            <a:endParaRPr/>
           </a:p>
         </p:txBody>
       </p:sp>
@@ -19156,6 +19288,7 @@
           <a:lstStyle/>
           <a:p>
             <a:pPr algn="ctr"/>
+            <a:endParaRPr/>
           </a:p>
         </p:txBody>
       </p:sp>
@@ -19199,6 +19332,7 @@
           <a:lstStyle/>
           <a:p>
             <a:pPr algn="ctr"/>
+            <a:endParaRPr/>
           </a:p>
         </p:txBody>
       </p:sp>
@@ -19277,6 +19411,7 @@
           <a:lstStyle/>
           <a:p>
             <a:pPr algn="ctr"/>
+            <a:endParaRPr/>
           </a:p>
         </p:txBody>
       </p:sp>
@@ -19355,6 +19490,7 @@
           <a:lstStyle/>
           <a:p>
             <a:pPr algn="ctr"/>
+            <a:endParaRPr/>
           </a:p>
         </p:txBody>
       </p:sp>
@@ -19433,6 +19569,7 @@
           <a:lstStyle/>
           <a:p>
             <a:pPr algn="ctr"/>
+            <a:endParaRPr/>
           </a:p>
         </p:txBody>
       </p:sp>
@@ -19476,6 +19613,7 @@
           <a:lstStyle/>
           <a:p>
             <a:pPr algn="ctr"/>
+            <a:endParaRPr/>
           </a:p>
         </p:txBody>
       </p:sp>
@@ -19554,6 +19692,7 @@
           <a:lstStyle/>
           <a:p>
             <a:pPr algn="ctr"/>
+            <a:endParaRPr/>
           </a:p>
         </p:txBody>
       </p:sp>
@@ -19632,6 +19771,7 @@
           <a:lstStyle/>
           <a:p>
             <a:pPr algn="ctr"/>
+            <a:endParaRPr/>
           </a:p>
         </p:txBody>
       </p:sp>
@@ -19710,6 +19850,7 @@
           <a:lstStyle/>
           <a:p>
             <a:pPr algn="ctr"/>
+            <a:endParaRPr/>
           </a:p>
         </p:txBody>
       </p:sp>
@@ -19753,6 +19894,7 @@
           <a:lstStyle/>
           <a:p>
             <a:pPr algn="ctr"/>
+            <a:endParaRPr/>
           </a:p>
         </p:txBody>
       </p:sp>
@@ -19831,6 +19973,7 @@
           <a:lstStyle/>
           <a:p>
             <a:pPr algn="ctr"/>
+            <a:endParaRPr/>
           </a:p>
         </p:txBody>
       </p:sp>
@@ -19909,6 +20052,7 @@
           <a:lstStyle/>
           <a:p>
             <a:pPr algn="ctr"/>
+            <a:endParaRPr/>
           </a:p>
         </p:txBody>
       </p:sp>
@@ -19987,6 +20131,7 @@
           <a:lstStyle/>
           <a:p>
             <a:pPr algn="ctr"/>
+            <a:endParaRPr/>
           </a:p>
         </p:txBody>
       </p:sp>
@@ -20030,6 +20175,7 @@
           <a:lstStyle/>
           <a:p>
             <a:pPr algn="ctr"/>
+            <a:endParaRPr/>
           </a:p>
         </p:txBody>
       </p:sp>
@@ -20108,6 +20254,7 @@
           <a:lstStyle/>
           <a:p>
             <a:pPr algn="ctr"/>
+            <a:endParaRPr/>
           </a:p>
         </p:txBody>
       </p:sp>
@@ -20186,6 +20333,7 @@
           <a:lstStyle/>
           <a:p>
             <a:pPr algn="ctr"/>
+            <a:endParaRPr/>
           </a:p>
         </p:txBody>
       </p:sp>
@@ -20264,6 +20412,7 @@
           <a:lstStyle/>
           <a:p>
             <a:pPr algn="ctr"/>
+            <a:endParaRPr/>
           </a:p>
         </p:txBody>
       </p:sp>
@@ -20307,6 +20456,7 @@
           <a:lstStyle/>
           <a:p>
             <a:pPr algn="ctr"/>
+            <a:endParaRPr/>
           </a:p>
         </p:txBody>
       </p:sp>
@@ -20385,6 +20535,7 @@
           <a:lstStyle/>
           <a:p>
             <a:pPr algn="ctr"/>
+            <a:endParaRPr/>
           </a:p>
         </p:txBody>
       </p:sp>
@@ -20463,6 +20614,7 @@
           <a:lstStyle/>
           <a:p>
             <a:pPr algn="ctr"/>
+            <a:endParaRPr/>
           </a:p>
         </p:txBody>
       </p:sp>
@@ -20541,6 +20693,7 @@
           <a:lstStyle/>
           <a:p>
             <a:pPr algn="ctr"/>
+            <a:endParaRPr/>
           </a:p>
         </p:txBody>
       </p:sp>
@@ -20553,7 +20706,7 @@
 </file>
 
 <file path=ppt/slides/slide8.xml><?xml version="1.0" encoding="utf-8"?>
-<p:sld xmlns:a="http://schemas.openxmlformats.org/drawingml/2006/main" xmlns:p="http://schemas.openxmlformats.org/presentationml/2006/main" xmlns:r="http://schemas.openxmlformats.org/officeDocument/2006/relationships">
+<p:sld xmlns:a="http://schemas.openxmlformats.org/drawingml/2006/main" xmlns:r="http://schemas.openxmlformats.org/officeDocument/2006/relationships" xmlns:p="http://schemas.openxmlformats.org/presentationml/2006/main">
   <p:cSld>
     <p:bg>
       <p:bgPr>
@@ -20569,7 +20722,14 @@
         <p:cNvGrpSpPr/>
         <p:nvPr/>
       </p:nvGrpSpPr>
-      <p:grpSpPr/>
+      <p:grpSpPr>
+        <a:xfrm>
+          <a:off x="0" y="0"/>
+          <a:ext cx="0" cy="0"/>
+          <a:chOff x="0" y="0"/>
+          <a:chExt cx="0" cy="0"/>
+        </a:xfrm>
+      </p:grpSpPr>
       <p:sp>
         <p:nvSpPr>
           <p:cNvPr id="2" name="Rectangle 1"/>
@@ -20610,6 +20770,7 @@
           <a:lstStyle/>
           <a:p>
             <a:pPr algn="ctr"/>
+            <a:endParaRPr/>
           </a:p>
         </p:txBody>
       </p:sp>
@@ -20653,6 +20814,7 @@
           <a:lstStyle/>
           <a:p>
             <a:pPr algn="ctr"/>
+            <a:endParaRPr/>
           </a:p>
         </p:txBody>
       </p:sp>
@@ -20768,6 +20930,7 @@
           <a:lstStyle/>
           <a:p>
             <a:pPr algn="ctr"/>
+            <a:endParaRPr/>
           </a:p>
         </p:txBody>
       </p:sp>
@@ -20811,6 +20974,7 @@
           <a:lstStyle/>
           <a:p>
             <a:pPr algn="ctr"/>
+            <a:endParaRPr/>
           </a:p>
         </p:txBody>
       </p:sp>
@@ -20924,6 +21088,7 @@
           <a:lstStyle/>
           <a:p>
             <a:pPr algn="ctr"/>
+            <a:endParaRPr/>
           </a:p>
         </p:txBody>
       </p:sp>
@@ -21005,6 +21170,7 @@
           <a:lstStyle/>
           <a:p>
             <a:pPr algn="ctr"/>
+            <a:endParaRPr/>
           </a:p>
         </p:txBody>
       </p:sp>
@@ -21048,6 +21214,7 @@
           <a:lstStyle/>
           <a:p>
             <a:pPr algn="ctr"/>
+            <a:endParaRPr/>
           </a:p>
         </p:txBody>
       </p:sp>
@@ -21161,6 +21328,7 @@
           <a:lstStyle/>
           <a:p>
             <a:pPr algn="ctr"/>
+            <a:endParaRPr/>
           </a:p>
         </p:txBody>
       </p:sp>
@@ -21242,6 +21410,7 @@
           <a:lstStyle/>
           <a:p>
             <a:pPr algn="ctr"/>
+            <a:endParaRPr/>
           </a:p>
         </p:txBody>
       </p:sp>
@@ -21285,6 +21454,7 @@
           <a:lstStyle/>
           <a:p>
             <a:pPr algn="ctr"/>
+            <a:endParaRPr/>
           </a:p>
         </p:txBody>
       </p:sp>
@@ -21398,6 +21568,7 @@
           <a:lstStyle/>
           <a:p>
             <a:pPr algn="ctr"/>
+            <a:endParaRPr/>
           </a:p>
         </p:txBody>
       </p:sp>
@@ -21479,6 +21650,7 @@
           <a:lstStyle/>
           <a:p>
             <a:pPr algn="ctr"/>
+            <a:endParaRPr/>
           </a:p>
         </p:txBody>
       </p:sp>
@@ -21522,6 +21694,7 @@
           <a:lstStyle/>
           <a:p>
             <a:pPr algn="ctr"/>
+            <a:endParaRPr/>
           </a:p>
         </p:txBody>
       </p:sp>
@@ -21635,6 +21808,7 @@
           <a:lstStyle/>
           <a:p>
             <a:pPr algn="ctr"/>
+            <a:endParaRPr/>
           </a:p>
         </p:txBody>
       </p:sp>
@@ -21716,6 +21890,7 @@
           <a:lstStyle/>
           <a:p>
             <a:pPr algn="ctr"/>
+            <a:endParaRPr/>
           </a:p>
         </p:txBody>
       </p:sp>
@@ -21759,6 +21934,7 @@
           <a:lstStyle/>
           <a:p>
             <a:pPr algn="ctr"/>
+            <a:endParaRPr/>
           </a:p>
         </p:txBody>
       </p:sp>
@@ -21872,6 +22048,7 @@
           <a:lstStyle/>
           <a:p>
             <a:pPr algn="ctr"/>
+            <a:endParaRPr/>
           </a:p>
         </p:txBody>
       </p:sp>
@@ -21953,6 +22130,7 @@
           <a:lstStyle/>
           <a:p>
             <a:pPr algn="ctr"/>
+            <a:endParaRPr/>
           </a:p>
         </p:txBody>
       </p:sp>
@@ -21996,6 +22174,7 @@
           <a:lstStyle/>
           <a:p>
             <a:pPr algn="ctr"/>
+            <a:endParaRPr/>
           </a:p>
         </p:txBody>
       </p:sp>
@@ -22109,6 +22288,7 @@
           <a:lstStyle/>
           <a:p>
             <a:pPr algn="ctr"/>
+            <a:endParaRPr/>
           </a:p>
         </p:txBody>
       </p:sp>
@@ -22190,6 +22370,7 @@
           <a:lstStyle/>
           <a:p>
             <a:pPr algn="ctr"/>
+            <a:endParaRPr/>
           </a:p>
         </p:txBody>
       </p:sp>
@@ -22233,6 +22414,7 @@
           <a:lstStyle/>
           <a:p>
             <a:pPr algn="ctr"/>
+            <a:endParaRPr/>
           </a:p>
         </p:txBody>
       </p:sp>
@@ -22346,6 +22528,7 @@
           <a:lstStyle/>
           <a:p>
             <a:pPr algn="ctr"/>
+            <a:endParaRPr/>
           </a:p>
         </p:txBody>
       </p:sp>
@@ -22427,6 +22610,7 @@
           <a:lstStyle/>
           <a:p>
             <a:pPr algn="ctr"/>
+            <a:endParaRPr/>
           </a:p>
         </p:txBody>
       </p:sp>
@@ -22470,6 +22654,7 @@
           <a:lstStyle/>
           <a:p>
             <a:pPr algn="ctr"/>
+            <a:endParaRPr/>
           </a:p>
         </p:txBody>
       </p:sp>
@@ -22583,6 +22768,7 @@
           <a:lstStyle/>
           <a:p>
             <a:pPr algn="ctr"/>
+            <a:endParaRPr/>
           </a:p>
         </p:txBody>
       </p:sp>
@@ -22631,7 +22817,7 @@
 </file>
 
 <file path=ppt/slides/slide9.xml><?xml version="1.0" encoding="utf-8"?>
-<p:sld xmlns:a="http://schemas.openxmlformats.org/drawingml/2006/main" xmlns:p="http://schemas.openxmlformats.org/presentationml/2006/main" xmlns:r="http://schemas.openxmlformats.org/officeDocument/2006/relationships">
+<p:sld xmlns:a="http://schemas.openxmlformats.org/drawingml/2006/main" xmlns:r="http://schemas.openxmlformats.org/officeDocument/2006/relationships" xmlns:p="http://schemas.openxmlformats.org/presentationml/2006/main">
   <p:cSld>
     <p:bg>
       <p:bgPr>
@@ -22647,7 +22833,14 @@
         <p:cNvGrpSpPr/>
         <p:nvPr/>
       </p:nvGrpSpPr>
-      <p:grpSpPr/>
+      <p:grpSpPr>
+        <a:xfrm>
+          <a:off x="0" y="0"/>
+          <a:ext cx="0" cy="0"/>
+          <a:chOff x="0" y="0"/>
+          <a:chExt cx="0" cy="0"/>
+        </a:xfrm>
+      </p:grpSpPr>
       <p:sp>
         <p:nvSpPr>
           <p:cNvPr id="2" name="Rectangle 1"/>
@@ -22688,6 +22881,7 @@
           <a:lstStyle/>
           <a:p>
             <a:pPr algn="ctr"/>
+            <a:endParaRPr/>
           </a:p>
         </p:txBody>
       </p:sp>
@@ -22731,6 +22925,7 @@
           <a:lstStyle/>
           <a:p>
             <a:pPr algn="ctr"/>
+            <a:endParaRPr/>
           </a:p>
         </p:txBody>
       </p:sp>
@@ -22846,6 +23041,7 @@
           <a:lstStyle/>
           <a:p>
             <a:pPr algn="ctr"/>
+            <a:endParaRPr/>
           </a:p>
         </p:txBody>
       </p:sp>
@@ -22889,6 +23085,7 @@
           <a:lstStyle/>
           <a:p>
             <a:pPr algn="ctr"/>
+            <a:endParaRPr/>
           </a:p>
         </p:txBody>
       </p:sp>
@@ -23002,6 +23199,7 @@
           <a:lstStyle/>
           <a:p>
             <a:pPr algn="ctr"/>
+            <a:endParaRPr/>
           </a:p>
         </p:txBody>
       </p:sp>
@@ -23083,6 +23281,7 @@
           <a:lstStyle/>
           <a:p>
             <a:pPr algn="ctr"/>
+            <a:endParaRPr/>
           </a:p>
         </p:txBody>
       </p:sp>
@@ -23126,6 +23325,7 @@
           <a:lstStyle/>
           <a:p>
             <a:pPr algn="ctr"/>
+            <a:endParaRPr/>
           </a:p>
         </p:txBody>
       </p:sp>
@@ -23239,6 +23439,7 @@
           <a:lstStyle/>
           <a:p>
             <a:pPr algn="ctr"/>
+            <a:endParaRPr/>
           </a:p>
         </p:txBody>
       </p:sp>
@@ -23320,6 +23521,7 @@
           <a:lstStyle/>
           <a:p>
             <a:pPr algn="ctr"/>
+            <a:endParaRPr/>
           </a:p>
         </p:txBody>
       </p:sp>
@@ -23363,6 +23565,7 @@
           <a:lstStyle/>
           <a:p>
             <a:pPr algn="ctr"/>
+            <a:endParaRPr/>
           </a:p>
         </p:txBody>
       </p:sp>
@@ -23476,6 +23679,7 @@
           <a:lstStyle/>
           <a:p>
             <a:pPr algn="ctr"/>
+            <a:endParaRPr/>
           </a:p>
         </p:txBody>
       </p:sp>
@@ -23557,6 +23761,7 @@
           <a:lstStyle/>
           <a:p>
             <a:pPr algn="ctr"/>
+            <a:endParaRPr/>
           </a:p>
         </p:txBody>
       </p:sp>
@@ -23600,6 +23805,7 @@
           <a:lstStyle/>
           <a:p>
             <a:pPr algn="ctr"/>
+            <a:endParaRPr/>
           </a:p>
         </p:txBody>
       </p:sp>
@@ -23713,6 +23919,7 @@
           <a:lstStyle/>
           <a:p>
             <a:pPr algn="ctr"/>
+            <a:endParaRPr/>
           </a:p>
         </p:txBody>
       </p:sp>
@@ -23794,6 +24001,7 @@
           <a:lstStyle/>
           <a:p>
             <a:pPr algn="ctr"/>
+            <a:endParaRPr/>
           </a:p>
         </p:txBody>
       </p:sp>
@@ -23837,6 +24045,7 @@
           <a:lstStyle/>
           <a:p>
             <a:pPr algn="ctr"/>
+            <a:endParaRPr/>
           </a:p>
         </p:txBody>
       </p:sp>
@@ -23950,6 +24159,7 @@
           <a:lstStyle/>
           <a:p>
             <a:pPr algn="ctr"/>
+            <a:endParaRPr/>
           </a:p>
         </p:txBody>
       </p:sp>
@@ -24031,6 +24241,7 @@
           <a:lstStyle/>
           <a:p>
             <a:pPr algn="ctr"/>
+            <a:endParaRPr/>
           </a:p>
         </p:txBody>
       </p:sp>
@@ -24074,6 +24285,7 @@
           <a:lstStyle/>
           <a:p>
             <a:pPr algn="ctr"/>
+            <a:endParaRPr/>
           </a:p>
         </p:txBody>
       </p:sp>
@@ -24187,6 +24399,7 @@
           <a:lstStyle/>
           <a:p>
             <a:pPr algn="ctr"/>
+            <a:endParaRPr/>
           </a:p>
         </p:txBody>
       </p:sp>
@@ -24268,6 +24481,7 @@
           <a:lstStyle/>
           <a:p>
             <a:pPr algn="ctr"/>
+            <a:endParaRPr/>
           </a:p>
         </p:txBody>
       </p:sp>
@@ -24311,6 +24525,7 @@
           <a:lstStyle/>
           <a:p>
             <a:pPr algn="ctr"/>
+            <a:endParaRPr/>
           </a:p>
         </p:txBody>
       </p:sp>
@@ -24424,6 +24639,7 @@
           <a:lstStyle/>
           <a:p>
             <a:pPr algn="ctr"/>
+            <a:endParaRPr/>
           </a:p>
         </p:txBody>
       </p:sp>
@@ -24505,6 +24721,7 @@
           <a:lstStyle/>
           <a:p>
             <a:pPr algn="ctr"/>
+            <a:endParaRPr/>
           </a:p>
         </p:txBody>
       </p:sp>
@@ -24548,6 +24765,7 @@
           <a:lstStyle/>
           <a:p>
             <a:pPr algn="ctr"/>
+            <a:endParaRPr/>
           </a:p>
         </p:txBody>
       </p:sp>
@@ -24661,6 +24879,7 @@
           <a:lstStyle/>
           <a:p>
             <a:pPr algn="ctr"/>
+            <a:endParaRPr/>
           </a:p>
         </p:txBody>
       </p:sp>
@@ -25039,44 +25258,44 @@
         <a:sysClr val="window" lastClr="FFFFFF"/>
       </a:lt1>
       <a:dk2>
-        <a:srgbClr val="1F497D"/>
+        <a:srgbClr val="0E2841"/>
       </a:dk2>
       <a:lt2>
-        <a:srgbClr val="EEECE1"/>
+        <a:srgbClr val="E8E8E8"/>
       </a:lt2>
       <a:accent1>
-        <a:srgbClr val="4F81BD"/>
+        <a:srgbClr val="156082"/>
       </a:accent1>
       <a:accent2>
-        <a:srgbClr val="C0504D"/>
+        <a:srgbClr val="E97132"/>
       </a:accent2>
       <a:accent3>
-        <a:srgbClr val="9BBB59"/>
+        <a:srgbClr val="196B24"/>
       </a:accent3>
       <a:accent4>
-        <a:srgbClr val="8064A2"/>
+        <a:srgbClr val="0F9ED5"/>
       </a:accent4>
       <a:accent5>
-        <a:srgbClr val="4BACC6"/>
+        <a:srgbClr val="A02B93"/>
       </a:accent5>
       <a:accent6>
-        <a:srgbClr val="F79646"/>
+        <a:srgbClr val="4EA72E"/>
       </a:accent6>
       <a:hlink>
-        <a:srgbClr val="0000FF"/>
+        <a:srgbClr val="467886"/>
       </a:hlink>
       <a:folHlink>
-        <a:srgbClr val="800080"/>
+        <a:srgbClr val="96607D"/>
       </a:folHlink>
     </a:clrScheme>
     <a:fontScheme name="Office">
       <a:majorFont>
-        <a:latin typeface="Calibri"/>
+        <a:latin typeface="Aptos Display" panose="02110004020202020204"/>
         <a:ea typeface=""/>
         <a:cs typeface=""/>
-        <a:font script="Jpan" typeface="ＭＳ Ｐゴシック"/>
+        <a:font script="Jpan" typeface="游ゴシック Light"/>
         <a:font script="Hang" typeface="맑은 고딕"/>
-        <a:font script="Hans" typeface="宋体"/>
+        <a:font script="Hans" typeface="等线 Light"/>
         <a:font script="Hant" typeface="新細明體"/>
         <a:font script="Arab" typeface="Times New Roman"/>
         <a:font script="Hebr" typeface="Times New Roman"/>
@@ -25104,14 +25323,31 @@
         <a:font script="Viet" typeface="Times New Roman"/>
         <a:font script="Uigh" typeface="Microsoft Uighur"/>
         <a:font script="Geor" typeface="Sylfaen"/>
+        <a:font script="Armn" typeface="Arial"/>
+        <a:font script="Bugi" typeface="Leelawadee UI"/>
+        <a:font script="Bopo" typeface="Microsoft JhengHei"/>
+        <a:font script="Java" typeface="Javanese Text"/>
+        <a:font script="Lisu" typeface="Segoe UI"/>
+        <a:font script="Mymr" typeface="Myanmar Text"/>
+        <a:font script="Nkoo" typeface="Ebrima"/>
+        <a:font script="Olck" typeface="Nirmala UI"/>
+        <a:font script="Osma" typeface="Ebrima"/>
+        <a:font script="Phag" typeface="Phagspa"/>
+        <a:font script="Syrn" typeface="Estrangelo Edessa"/>
+        <a:font script="Syrj" typeface="Estrangelo Edessa"/>
+        <a:font script="Syre" typeface="Estrangelo Edessa"/>
+        <a:font script="Sora" typeface="Nirmala UI"/>
+        <a:font script="Tale" typeface="Microsoft Tai Le"/>
+        <a:font script="Talu" typeface="Microsoft New Tai Lue"/>
+        <a:font script="Tfng" typeface="Ebrima"/>
       </a:majorFont>
       <a:minorFont>
-        <a:latin typeface="Calibri"/>
+        <a:latin typeface="Aptos" panose="02110004020202020204"/>
         <a:ea typeface=""/>
         <a:cs typeface=""/>
-        <a:font script="Jpan" typeface="ＭＳ Ｐゴシック"/>
+        <a:font script="Jpan" typeface="游ゴシック"/>
         <a:font script="Hang" typeface="맑은 고딕"/>
-        <a:font script="Hans" typeface="宋体"/>
+        <a:font script="Hans" typeface="等线"/>
         <a:font script="Hant" typeface="新細明體"/>
         <a:font script="Arab" typeface="Arial"/>
         <a:font script="Hebr" typeface="Arial"/>
@@ -25139,6 +25375,23 @@
         <a:font script="Viet" typeface="Arial"/>
         <a:font script="Uigh" typeface="Microsoft Uighur"/>
         <a:font script="Geor" typeface="Sylfaen"/>
+        <a:font script="Armn" typeface="Arial"/>
+        <a:font script="Bugi" typeface="Leelawadee UI"/>
+        <a:font script="Bopo" typeface="Microsoft JhengHei"/>
+        <a:font script="Java" typeface="Javanese Text"/>
+        <a:font script="Lisu" typeface="Segoe UI"/>
+        <a:font script="Mymr" typeface="Myanmar Text"/>
+        <a:font script="Nkoo" typeface="Ebrima"/>
+        <a:font script="Olck" typeface="Nirmala UI"/>
+        <a:font script="Osma" typeface="Ebrima"/>
+        <a:font script="Phag" typeface="Phagspa"/>
+        <a:font script="Syrn" typeface="Estrangelo Edessa"/>
+        <a:font script="Syrj" typeface="Estrangelo Edessa"/>
+        <a:font script="Syre" typeface="Estrangelo Edessa"/>
+        <a:font script="Sora" typeface="Nirmala UI"/>
+        <a:font script="Tale" typeface="Microsoft Tai Le"/>
+        <a:font script="Talu" typeface="Microsoft New Tai Lue"/>
+        <a:font script="Tfng" typeface="Ebrima"/>
       </a:minorFont>
     </a:fontScheme>
     <a:fmtScheme name="Office">
@@ -25150,180 +25403,136 @@
           <a:gsLst>
             <a:gs pos="0">
               <a:schemeClr val="phClr">
-                <a:tint val="50000"/>
-                <a:satMod val="300000"/>
+                <a:lumMod val="110000"/>
+                <a:satMod val="105000"/>
+                <a:tint val="67000"/>
               </a:schemeClr>
             </a:gs>
-            <a:gs pos="35000">
+            <a:gs pos="50000">
               <a:schemeClr val="phClr">
-                <a:tint val="37000"/>
-                <a:satMod val="300000"/>
+                <a:lumMod val="105000"/>
+                <a:satMod val="103000"/>
+                <a:tint val="73000"/>
               </a:schemeClr>
             </a:gs>
             <a:gs pos="100000">
               <a:schemeClr val="phClr">
-                <a:tint val="15000"/>
-                <a:satMod val="350000"/>
+                <a:lumMod val="105000"/>
+                <a:satMod val="109000"/>
+                <a:tint val="81000"/>
               </a:schemeClr>
             </a:gs>
           </a:gsLst>
-          <a:lin ang="16200000" scaled="1"/>
+          <a:lin ang="5400000" scaled="0"/>
         </a:gradFill>
         <a:gradFill rotWithShape="1">
           <a:gsLst>
             <a:gs pos="0">
               <a:schemeClr val="phClr">
-                <a:tint val="100000"/>
+                <a:satMod val="103000"/>
+                <a:lumMod val="102000"/>
+                <a:tint val="94000"/>
+              </a:schemeClr>
+            </a:gs>
+            <a:gs pos="50000">
+              <a:schemeClr val="phClr">
+                <a:satMod val="110000"/>
+                <a:lumMod val="100000"/>
                 <a:shade val="100000"/>
-                <a:satMod val="130000"/>
               </a:schemeClr>
             </a:gs>
             <a:gs pos="100000">
               <a:schemeClr val="phClr">
-                <a:tint val="50000"/>
-                <a:shade val="100000"/>
-                <a:satMod val="350000"/>
+                <a:lumMod val="99000"/>
+                <a:satMod val="120000"/>
+                <a:shade val="78000"/>
               </a:schemeClr>
             </a:gs>
           </a:gsLst>
-          <a:lin ang="16200000" scaled="0"/>
+          <a:lin ang="5400000" scaled="0"/>
         </a:gradFill>
       </a:fillStyleLst>
       <a:lnStyleLst>
-        <a:ln w="9525" cap="flat" cmpd="sng" algn="ctr">
-          <a:solidFill>
-            <a:schemeClr val="phClr">
-              <a:shade val="95000"/>
-              <a:satMod val="105000"/>
-            </a:schemeClr>
+        <a:ln w="12700" cap="flat" cmpd="sng" algn="ctr">
+          <a:solidFill>
+            <a:schemeClr val="phClr"/>
           </a:solidFill>
           <a:prstDash val="solid"/>
+          <a:miter lim="800000"/>
+        </a:ln>
+        <a:ln w="19050" cap="flat" cmpd="sng" algn="ctr">
+          <a:solidFill>
+            <a:schemeClr val="phClr"/>
+          </a:solidFill>
+          <a:prstDash val="solid"/>
+          <a:miter lim="800000"/>
         </a:ln>
         <a:ln w="25400" cap="flat" cmpd="sng" algn="ctr">
           <a:solidFill>
             <a:schemeClr val="phClr"/>
           </a:solidFill>
           <a:prstDash val="solid"/>
-        </a:ln>
-        <a:ln w="38100" cap="flat" cmpd="sng" algn="ctr">
-          <a:solidFill>
-            <a:schemeClr val="phClr"/>
-          </a:solidFill>
-          <a:prstDash val="solid"/>
+          <a:miter lim="800000"/>
         </a:ln>
       </a:lnStyleLst>
       <a:effectStyleLst>
         <a:effectStyle>
+          <a:effectLst/>
+        </a:effectStyle>
+        <a:effectStyle>
+          <a:effectLst/>
+        </a:effectStyle>
+        <a:effectStyle>
           <a:effectLst>
-            <a:outerShdw blurRad="40000" dist="20000" dir="5400000" rotWithShape="0">
+            <a:outerShdw blurRad="57150" dist="19050" dir="5400000" algn="ctr" rotWithShape="0">
               <a:srgbClr val="000000">
-                <a:alpha val="38000"/>
+                <a:alpha val="63000"/>
               </a:srgbClr>
             </a:outerShdw>
           </a:effectLst>
-        </a:effectStyle>
-        <a:effectStyle>
-          <a:effectLst>
-            <a:outerShdw blurRad="40000" dist="23000" dir="5400000" rotWithShape="0">
-              <a:srgbClr val="000000">
-                <a:alpha val="35000"/>
-              </a:srgbClr>
-            </a:outerShdw>
-          </a:effectLst>
-        </a:effectStyle>
-        <a:effectStyle>
-          <a:effectLst>
-            <a:outerShdw blurRad="40000" dist="23000" dir="5400000" rotWithShape="0">
-              <a:srgbClr val="000000">
-                <a:alpha val="35000"/>
-              </a:srgbClr>
-            </a:outerShdw>
-          </a:effectLst>
-          <a:scene3d>
-            <a:camera prst="orthographicFront">
-              <a:rot lat="0" lon="0" rev="0"/>
-            </a:camera>
-            <a:lightRig rig="threePt" dir="t">
-              <a:rot lat="0" lon="0" rev="1200000"/>
-            </a:lightRig>
-          </a:scene3d>
-          <a:sp3d>
-            <a:bevelT w="63500" h="25400"/>
-          </a:sp3d>
         </a:effectStyle>
       </a:effectStyleLst>
       <a:bgFillStyleLst>
         <a:solidFill>
           <a:schemeClr val="phClr"/>
         </a:solidFill>
+        <a:solidFill>
+          <a:schemeClr val="phClr">
+            <a:tint val="95000"/>
+            <a:satMod val="170000"/>
+          </a:schemeClr>
+        </a:solidFill>
         <a:gradFill rotWithShape="1">
           <a:gsLst>
             <a:gs pos="0">
               <a:schemeClr val="phClr">
-                <a:tint val="40000"/>
-                <a:satMod val="350000"/>
+                <a:tint val="93000"/>
+                <a:satMod val="150000"/>
+                <a:shade val="98000"/>
+                <a:lumMod val="102000"/>
               </a:schemeClr>
             </a:gs>
-            <a:gs pos="40000">
+            <a:gs pos="50000">
               <a:schemeClr val="phClr">
-                <a:tint val="45000"/>
-                <a:shade val="99000"/>
-                <a:satMod val="350000"/>
+                <a:tint val="98000"/>
+                <a:satMod val="130000"/>
+                <a:shade val="90000"/>
+                <a:lumMod val="103000"/>
               </a:schemeClr>
             </a:gs>
             <a:gs pos="100000">
               <a:schemeClr val="phClr">
-                <a:shade val="20000"/>
-                <a:satMod val="255000"/>
+                <a:shade val="63000"/>
+                <a:satMod val="120000"/>
               </a:schemeClr>
             </a:gs>
           </a:gsLst>
-          <a:path path="circle">
-            <a:fillToRect l="50000" t="-80000" r="50000" b="180000"/>
-          </a:path>
-        </a:gradFill>
-        <a:gradFill rotWithShape="1">
-          <a:gsLst>
-            <a:gs pos="0">
-              <a:schemeClr val="phClr">
-                <a:tint val="80000"/>
-                <a:satMod val="300000"/>
-              </a:schemeClr>
-            </a:gs>
-            <a:gs pos="100000">
-              <a:schemeClr val="phClr">
-                <a:shade val="30000"/>
-                <a:satMod val="200000"/>
-              </a:schemeClr>
-            </a:gs>
-          </a:gsLst>
-          <a:path path="circle">
-            <a:fillToRect l="50000" t="50000" r="50000" b="50000"/>
-          </a:path>
+          <a:lin ang="5400000" scaled="0"/>
         </a:gradFill>
       </a:bgFillStyleLst>
     </a:fmtScheme>
   </a:themeElements>
   <a:objectDefaults>
-    <a:spDef>
-      <a:spPr/>
-      <a:bodyPr/>
-      <a:lstStyle/>
-      <a:style>
-        <a:lnRef idx="1">
-          <a:schemeClr val="accent1"/>
-        </a:lnRef>
-        <a:fillRef idx="3">
-          <a:schemeClr val="accent1"/>
-        </a:fillRef>
-        <a:effectRef idx="2">
-          <a:schemeClr val="accent1"/>
-        </a:effectRef>
-        <a:fontRef idx="minor">
-          <a:schemeClr val="lt1"/>
-        </a:fontRef>
-      </a:style>
-    </a:spDef>
     <a:lnDef>
       <a:spPr/>
       <a:bodyPr/>
@@ -25345,5 +25554,10 @@
     </a:lnDef>
   </a:objectDefaults>
   <a:extraClrSchemeLst/>
+  <a:extLst>
+    <a:ext uri="{05A4C25C-085E-4340-85A3-A5531E510DB2}">
+      <thm15:themeFamily xmlns:thm15="http://schemas.microsoft.com/office/thememl/2012/main" name="Office Theme" id="{2E142A2C-CD16-42D6-873A-C26D2A0506FA}" vid="{1BDDFF52-6CD6-40A5-AB3C-68EB2F1E4D0A}"/>
+    </a:ext>
+  </a:extLst>
 </a:theme>
 </file>